--- a/labs/lab07/presentation/output/os-intro-lab07-presentation.pptx
+++ b/labs/lab07/presentation/output/os-intro-lab07-presentation.pptx
@@ -71,10 +71,6 @@
     <p:sldId id="319" r:id="rId65"/>
     <p:sldId id="320" r:id="rId66"/>
     <p:sldId id="321" r:id="rId67"/>
-    <p:sldId id="322" r:id="rId68"/>
-    <p:sldId id="323" r:id="rId69"/>
-    <p:sldId id="324" r:id="rId70"/>
-    <p:sldId id="325" r:id="rId71"/>
   </p:sldIdLst>
   <p:sldSz cx="9144000" cy="5143500" type="screen16x9"/>
   <p:notesSz cx="6858000" cy="9144000"/>
@@ -3272,209 +3268,6 @@
           <a:chExt cx="0" cy="0"/>
         </a:xfrm>
       </p:grpSpPr>
-    </p:spTree>
-  </p:cSld>
-</p:sld>
-</file>
-
-<file path=ppt/slides/slide11.xml><?xml version="1.0" encoding="utf-8"?>
-<p:sld xmlns:a="http://schemas.openxmlformats.org/drawingml/2006/main" xmlns:r="http://schemas.openxmlformats.org/officeDocument/2006/relationships" xmlns:p="http://schemas.openxmlformats.org/presentationml/2006/main">
-  <p:cSld>
-    <p:spTree>
-      <p:nvGrpSpPr>
-        <p:cNvPr id="1" name=""/>
-        <p:cNvGrpSpPr/>
-        <p:nvPr/>
-      </p:nvGrpSpPr>
-      <p:grpSpPr>
-        <a:xfrm>
-          <a:off x="0" y="0"/>
-          <a:ext cx="0" cy="0"/>
-          <a:chOff x="0" y="0"/>
-          <a:chExt cx="0" cy="0"/>
-        </a:xfrm>
-      </p:grpSpPr>
-      <p:sp>
-        <p:nvSpPr>
-          <p:cNvPr id="2" name="Title 1"/>
-          <p:cNvSpPr>
-            <a:spLocks noGrp="1"/>
-          </p:cNvSpPr>
-          <p:nvPr>
-            <p:ph type="title"/>
-          </p:nvPr>
-        </p:nvSpPr>
-        <p:spPr>
-          <a:xfrm>
-            <a:off x="722313" y="3305176"/>
-            <a:ext cx="7772400" cy="1021556"/>
-          </a:xfrm>
-        </p:spPr>
-        <p:txBody>
-          <a:bodyPr/>
-          <a:lstStyle/>
-          <a:p>
-            <a:pPr lvl="0" indent="0" marL="0">
-              <a:buNone/>
-            </a:pPr>
-            <a:r>
-              <a:rPr/>
-              <a:t>Выполнение лабораторной работы</a:t>
-            </a:r>
-          </a:p>
-        </p:txBody>
-      </p:sp>
-    </p:spTree>
-  </p:cSld>
-</p:sld>
-</file>
-
-<file path=ppt/slides/slide12.xml><?xml version="1.0" encoding="utf-8"?>
-<p:sld xmlns:a="http://schemas.openxmlformats.org/drawingml/2006/main" xmlns:r="http://schemas.openxmlformats.org/officeDocument/2006/relationships" xmlns:p="http://schemas.openxmlformats.org/presentationml/2006/main">
-  <p:cSld>
-    <p:spTree>
-      <p:nvGrpSpPr>
-        <p:cNvPr id="1" name=""/>
-        <p:cNvGrpSpPr/>
-        <p:nvPr/>
-      </p:nvGrpSpPr>
-      <p:grpSpPr>
-        <a:xfrm>
-          <a:off x="0" y="0"/>
-          <a:ext cx="0" cy="0"/>
-          <a:chOff x="0" y="0"/>
-          <a:chExt cx="0" cy="0"/>
-        </a:xfrm>
-      </p:grpSpPr>
-      <p:sp>
-        <p:nvSpPr>
-          <p:cNvPr id="2" name="Title 1"/>
-          <p:cNvSpPr>
-            <a:spLocks noGrp="1"/>
-          </p:cNvSpPr>
-          <p:nvPr>
-            <p:ph type="title"/>
-          </p:nvPr>
-        </p:nvSpPr>
-        <p:spPr/>
-        <p:txBody>
-          <a:bodyPr/>
-          <a:lstStyle/>
-          <a:p>
-            <a:pPr lvl="0" indent="0" marL="0">
-              <a:buNone/>
-            </a:pPr>
-            <a:r>
-              <a:rPr/>
-              <a:t>1. Выполним все примеры, приведённые в первой части описания лабораторной работы:</a:t>
-            </a:r>
-          </a:p>
-        </p:txBody>
-      </p:sp>
-      <p:pic>
-        <p:nvPicPr>
-          <p:cNvPr descr="image/1.png" id="0" name="Picture 1"/>
-          <p:cNvPicPr>
-            <a:picLocks noGrp="1" noChangeAspect="1"/>
-          </p:cNvPicPr>
-          <p:nvPr/>
-        </p:nvPicPr>
-        <p:blipFill>
-          <a:blip r:embed="rId2"/>
-          <a:stretch>
-            <a:fillRect/>
-          </a:stretch>
-        </p:blipFill>
-        <p:spPr bwMode="auto">
-          <a:xfrm>
-            <a:off x="1003300" y="1193800"/>
-            <a:ext cx="7124700" cy="2882900"/>
-          </a:xfrm>
-          <a:prstGeom prst="rect">
-            <a:avLst/>
-          </a:prstGeom>
-          <a:noFill/>
-          <a:ln w="9525">
-            <a:noFill/>
-            <a:headEnd/>
-            <a:tailEnd/>
-          </a:ln>
-        </p:spPr>
-      </p:pic>
-      <p:sp>
-        <p:nvSpPr>
-          <p:cNvPr id="1" name="TextBox 3"/>
-          <p:cNvSpPr txBox="1"/>
-          <p:nvPr/>
-        </p:nvSpPr>
-        <p:spPr>
-          <a:xfrm>
-            <a:off x="457200" y="4076700"/>
-            <a:ext cx="8229600" cy="508000"/>
-          </a:xfrm>
-          <a:prstGeom prst="rect">
-            <a:avLst/>
-          </a:prstGeom>
-          <a:noFill/>
-        </p:spPr>
-        <p:txBody>
-          <a:bodyPr/>
-          <a:lstStyle/>
-          <a:p>
-            <a:pPr lvl="0" indent="0" marL="0" algn="ctr">
-              <a:buNone/>
-            </a:pPr>
-            <a:r>
-              <a:rPr/>
-              <a:t>Рисунок 1: Выполнение программ из примеров</a:t>
-            </a:r>
-          </a:p>
-        </p:txBody>
-      </p:sp>
-    </p:spTree>
-  </p:cSld>
-</p:sld>
-</file>
-
-<file path=ppt/slides/slide13.xml><?xml version="1.0" encoding="utf-8"?>
-<p:sld xmlns:a="http://schemas.openxmlformats.org/drawingml/2006/main" xmlns:r="http://schemas.openxmlformats.org/officeDocument/2006/relationships" xmlns:p="http://schemas.openxmlformats.org/presentationml/2006/main">
-  <p:cSld>
-    <p:spTree>
-      <p:nvGrpSpPr>
-        <p:cNvPr id="1" name=""/>
-        <p:cNvGrpSpPr/>
-        <p:nvPr/>
-      </p:nvGrpSpPr>
-      <p:grpSpPr>
-        <a:xfrm>
-          <a:off x="0" y="0"/>
-          <a:ext cx="0" cy="0"/>
-          <a:chOff x="0" y="0"/>
-          <a:chExt cx="0" cy="0"/>
-        </a:xfrm>
-      </p:grpSpPr>
-    </p:spTree>
-  </p:cSld>
-</p:sld>
-</file>
-
-<file path=ppt/slides/slide14.xml><?xml version="1.0" encoding="utf-8"?>
-<p:sld xmlns:a="http://schemas.openxmlformats.org/drawingml/2006/main" xmlns:r="http://schemas.openxmlformats.org/officeDocument/2006/relationships" xmlns:p="http://schemas.openxmlformats.org/presentationml/2006/main">
-  <p:cSld>
-    <p:spTree>
-      <p:nvGrpSpPr>
-        <p:cNvPr id="1" name=""/>
-        <p:cNvGrpSpPr/>
-        <p:nvPr/>
-      </p:nvGrpSpPr>
-      <p:grpSpPr>
-        <a:xfrm>
-          <a:off x="0" y="0"/>
-          <a:ext cx="0" cy="0"/>
-          <a:chOff x="0" y="0"/>
-          <a:chExt cx="0" cy="0"/>
-        </a:xfrm>
-      </p:grpSpPr>
       <p:sp>
         <p:nvSpPr>
           <p:cNvPr id="2" name="Title 1"/>
@@ -3598,7 +3391,7 @@
 </p:sld>
 </file>
 
-<file path=ppt/slides/slide15.xml><?xml version="1.0" encoding="utf-8"?>
+<file path=ppt/slides/slide11.xml><?xml version="1.0" encoding="utf-8"?>
 <p:sld xmlns:a="http://schemas.openxmlformats.org/drawingml/2006/main" xmlns:r="http://schemas.openxmlformats.org/officeDocument/2006/relationships" xmlns:p="http://schemas.openxmlformats.org/presentationml/2006/main">
   <p:cSld>
     <p:spTree>
@@ -3708,7 +3501,7 @@
 </p:sld>
 </file>
 
-<file path=ppt/slides/slide16.xml><?xml version="1.0" encoding="utf-8"?>
+<file path=ppt/slides/slide12.xml><?xml version="1.0" encoding="utf-8"?>
 <p:sld xmlns:a="http://schemas.openxmlformats.org/drawingml/2006/main" xmlns:r="http://schemas.openxmlformats.org/officeDocument/2006/relationships" xmlns:p="http://schemas.openxmlformats.org/presentationml/2006/main">
   <p:cSld>
     <p:spTree>
@@ -3818,7 +3611,7 @@
 </p:sld>
 </file>
 
-<file path=ppt/slides/slide17.xml><?xml version="1.0" encoding="utf-8"?>
+<file path=ppt/slides/slide13.xml><?xml version="1.0" encoding="utf-8"?>
 <p:sld xmlns:a="http://schemas.openxmlformats.org/drawingml/2006/main" xmlns:r="http://schemas.openxmlformats.org/officeDocument/2006/relationships" xmlns:p="http://schemas.openxmlformats.org/presentationml/2006/main">
   <p:cSld>
     <p:spTree>
@@ -3928,7 +3721,7 @@
 </p:sld>
 </file>
 
-<file path=ppt/slides/slide18.xml><?xml version="1.0" encoding="utf-8"?>
+<file path=ppt/slides/slide14.xml><?xml version="1.0" encoding="utf-8"?>
 <p:sld xmlns:a="http://schemas.openxmlformats.org/drawingml/2006/main" xmlns:r="http://schemas.openxmlformats.org/officeDocument/2006/relationships" xmlns:p="http://schemas.openxmlformats.org/presentationml/2006/main">
   <p:cSld>
     <p:spTree>
@@ -4038,7 +3831,7 @@
 </p:sld>
 </file>
 
-<file path=ppt/slides/slide19.xml><?xml version="1.0" encoding="utf-8"?>
+<file path=ppt/slides/slide15.xml><?xml version="1.0" encoding="utf-8"?>
 <p:sld xmlns:a="http://schemas.openxmlformats.org/drawingml/2006/main" xmlns:r="http://schemas.openxmlformats.org/officeDocument/2006/relationships" xmlns:p="http://schemas.openxmlformats.org/presentationml/2006/main">
   <p:cSld>
     <p:spTree>
@@ -4148,59 +3941,7 @@
 </p:sld>
 </file>
 
-<file path=ppt/slides/slide2.xml><?xml version="1.0" encoding="utf-8"?>
-<p:sld xmlns:a="http://schemas.openxmlformats.org/drawingml/2006/main" xmlns:r="http://schemas.openxmlformats.org/officeDocument/2006/relationships" xmlns:p="http://schemas.openxmlformats.org/presentationml/2006/main">
-  <p:cSld>
-    <p:spTree>
-      <p:nvGrpSpPr>
-        <p:cNvPr id="1" name=""/>
-        <p:cNvGrpSpPr/>
-        <p:nvPr/>
-      </p:nvGrpSpPr>
-      <p:grpSpPr>
-        <a:xfrm>
-          <a:off x="0" y="0"/>
-          <a:ext cx="0" cy="0"/>
-          <a:chOff x="0" y="0"/>
-          <a:chExt cx="0" cy="0"/>
-        </a:xfrm>
-      </p:grpSpPr>
-      <p:sp>
-        <p:nvSpPr>
-          <p:cNvPr id="2" name="Title 1"/>
-          <p:cNvSpPr>
-            <a:spLocks noGrp="1"/>
-          </p:cNvSpPr>
-          <p:nvPr>
-            <p:ph type="title"/>
-          </p:nvPr>
-        </p:nvSpPr>
-        <p:spPr>
-          <a:xfrm>
-            <a:off x="722313" y="3305176"/>
-            <a:ext cx="7772400" cy="1021556"/>
-          </a:xfrm>
-        </p:spPr>
-        <p:txBody>
-          <a:bodyPr/>
-          <a:lstStyle/>
-          <a:p>
-            <a:pPr lvl="0" indent="0" marL="0">
-              <a:buNone/>
-            </a:pPr>
-            <a:r>
-              <a:rPr/>
-              <a:t>Докладчик</a:t>
-            </a:r>
-          </a:p>
-        </p:txBody>
-      </p:sp>
-    </p:spTree>
-  </p:cSld>
-</p:sld>
-</file>
-
-<file path=ppt/slides/slide20.xml><?xml version="1.0" encoding="utf-8"?>
+<file path=ppt/slides/slide16.xml><?xml version="1.0" encoding="utf-8"?>
 <p:sld xmlns:a="http://schemas.openxmlformats.org/drawingml/2006/main" xmlns:r="http://schemas.openxmlformats.org/officeDocument/2006/relationships" xmlns:p="http://schemas.openxmlformats.org/presentationml/2006/main">
   <p:cSld>
     <p:spTree>
@@ -4310,7 +4051,7 @@
 </p:sld>
 </file>
 
-<file path=ppt/slides/slide21.xml><?xml version="1.0" encoding="utf-8"?>
+<file path=ppt/slides/slide17.xml><?xml version="1.0" encoding="utf-8"?>
 <p:sld xmlns:a="http://schemas.openxmlformats.org/drawingml/2006/main" xmlns:r="http://schemas.openxmlformats.org/officeDocument/2006/relationships" xmlns:p="http://schemas.openxmlformats.org/presentationml/2006/main">
   <p:cSld>
     <p:spTree>
@@ -4420,7 +4161,7 @@
 </p:sld>
 </file>
 
-<file path=ppt/slides/slide22.xml><?xml version="1.0" encoding="utf-8"?>
+<file path=ppt/slides/slide18.xml><?xml version="1.0" encoding="utf-8"?>
 <p:sld xmlns:a="http://schemas.openxmlformats.org/drawingml/2006/main" xmlns:r="http://schemas.openxmlformats.org/officeDocument/2006/relationships" xmlns:p="http://schemas.openxmlformats.org/presentationml/2006/main">
   <p:cSld>
     <p:spTree>
@@ -4442,7 +4183,7 @@
 </p:sld>
 </file>
 
-<file path=ppt/slides/slide23.xml><?xml version="1.0" encoding="utf-8"?>
+<file path=ppt/slides/slide19.xml><?xml version="1.0" encoding="utf-8"?>
 <p:sld xmlns:a="http://schemas.openxmlformats.org/drawingml/2006/main" xmlns:r="http://schemas.openxmlformats.org/officeDocument/2006/relationships" xmlns:p="http://schemas.openxmlformats.org/presentationml/2006/main">
   <p:cSld>
     <p:spTree>
@@ -4579,7 +4320,59 @@
 </p:sld>
 </file>
 
-<file path=ppt/slides/slide24.xml><?xml version="1.0" encoding="utf-8"?>
+<file path=ppt/slides/slide2.xml><?xml version="1.0" encoding="utf-8"?>
+<p:sld xmlns:a="http://schemas.openxmlformats.org/drawingml/2006/main" xmlns:r="http://schemas.openxmlformats.org/officeDocument/2006/relationships" xmlns:p="http://schemas.openxmlformats.org/presentationml/2006/main">
+  <p:cSld>
+    <p:spTree>
+      <p:nvGrpSpPr>
+        <p:cNvPr id="1" name=""/>
+        <p:cNvGrpSpPr/>
+        <p:nvPr/>
+      </p:nvGrpSpPr>
+      <p:grpSpPr>
+        <a:xfrm>
+          <a:off x="0" y="0"/>
+          <a:ext cx="0" cy="0"/>
+          <a:chOff x="0" y="0"/>
+          <a:chExt cx="0" cy="0"/>
+        </a:xfrm>
+      </p:grpSpPr>
+      <p:sp>
+        <p:nvSpPr>
+          <p:cNvPr id="2" name="Title 1"/>
+          <p:cNvSpPr>
+            <a:spLocks noGrp="1"/>
+          </p:cNvSpPr>
+          <p:nvPr>
+            <p:ph type="title"/>
+          </p:nvPr>
+        </p:nvSpPr>
+        <p:spPr>
+          <a:xfrm>
+            <a:off x="722313" y="3305176"/>
+            <a:ext cx="7772400" cy="1021556"/>
+          </a:xfrm>
+        </p:spPr>
+        <p:txBody>
+          <a:bodyPr/>
+          <a:lstStyle/>
+          <a:p>
+            <a:pPr lvl="0" indent="0" marL="0">
+              <a:buNone/>
+            </a:pPr>
+            <a:r>
+              <a:rPr/>
+              <a:t>Докладчик</a:t>
+            </a:r>
+          </a:p>
+        </p:txBody>
+      </p:sp>
+    </p:spTree>
+  </p:cSld>
+</p:sld>
+</file>
+
+<file path=ppt/slides/slide20.xml><?xml version="1.0" encoding="utf-8"?>
 <p:sld xmlns:a="http://schemas.openxmlformats.org/drawingml/2006/main" xmlns:r="http://schemas.openxmlformats.org/officeDocument/2006/relationships" xmlns:p="http://schemas.openxmlformats.org/presentationml/2006/main">
   <p:cSld>
     <p:spTree>
@@ -4601,7 +4394,7 @@
 </p:sld>
 </file>
 
-<file path=ppt/slides/slide25.xml><?xml version="1.0" encoding="utf-8"?>
+<file path=ppt/slides/slide21.xml><?xml version="1.0" encoding="utf-8"?>
 <p:sld xmlns:a="http://schemas.openxmlformats.org/drawingml/2006/main" xmlns:r="http://schemas.openxmlformats.org/officeDocument/2006/relationships" xmlns:p="http://schemas.openxmlformats.org/presentationml/2006/main">
   <p:cSld>
     <p:spTree>
@@ -4741,7 +4534,7 @@
 </p:sld>
 </file>
 
-<file path=ppt/slides/slide26.xml><?xml version="1.0" encoding="utf-8"?>
+<file path=ppt/slides/slide22.xml><?xml version="1.0" encoding="utf-8"?>
 <p:sld xmlns:a="http://schemas.openxmlformats.org/drawingml/2006/main" xmlns:r="http://schemas.openxmlformats.org/officeDocument/2006/relationships" xmlns:p="http://schemas.openxmlformats.org/presentationml/2006/main">
   <p:cSld>
     <p:spTree>
@@ -4851,7 +4644,7 @@
 </p:sld>
 </file>
 
-<file path=ppt/slides/slide27.xml><?xml version="1.0" encoding="utf-8"?>
+<file path=ppt/slides/slide23.xml><?xml version="1.0" encoding="utf-8"?>
 <p:sld xmlns:a="http://schemas.openxmlformats.org/drawingml/2006/main" xmlns:r="http://schemas.openxmlformats.org/officeDocument/2006/relationships" xmlns:p="http://schemas.openxmlformats.org/presentationml/2006/main">
   <p:cSld>
     <p:spTree>
@@ -4961,7 +4754,7 @@
 </p:sld>
 </file>
 
-<file path=ppt/slides/slide28.xml><?xml version="1.0" encoding="utf-8"?>
+<file path=ppt/slides/slide24.xml><?xml version="1.0" encoding="utf-8"?>
 <p:sld xmlns:a="http://schemas.openxmlformats.org/drawingml/2006/main" xmlns:r="http://schemas.openxmlformats.org/officeDocument/2006/relationships" xmlns:p="http://schemas.openxmlformats.org/presentationml/2006/main">
   <p:cSld>
     <p:spTree>
@@ -5071,7 +4864,7 @@
 </p:sld>
 </file>
 
-<file path=ppt/slides/slide29.xml><?xml version="1.0" encoding="utf-8"?>
+<file path=ppt/slides/slide25.xml><?xml version="1.0" encoding="utf-8"?>
 <p:sld xmlns:a="http://schemas.openxmlformats.org/drawingml/2006/main" xmlns:r="http://schemas.openxmlformats.org/officeDocument/2006/relationships" xmlns:p="http://schemas.openxmlformats.org/presentationml/2006/main">
   <p:cSld>
     <p:spTree>
@@ -5172,6 +4965,446 @@
             <a:r>
               <a:rPr/>
               <a:t>Рисунок 15: Перемещение каталога</a:t>
+            </a:r>
+          </a:p>
+        </p:txBody>
+      </p:sp>
+    </p:spTree>
+  </p:cSld>
+</p:sld>
+</file>
+
+<file path=ppt/slides/slide26.xml><?xml version="1.0" encoding="utf-8"?>
+<p:sld xmlns:a="http://schemas.openxmlformats.org/drawingml/2006/main" xmlns:r="http://schemas.openxmlformats.org/officeDocument/2006/relationships" xmlns:p="http://schemas.openxmlformats.org/presentationml/2006/main">
+  <p:cSld>
+    <p:spTree>
+      <p:nvGrpSpPr>
+        <p:cNvPr id="1" name=""/>
+        <p:cNvGrpSpPr/>
+        <p:nvPr/>
+      </p:nvGrpSpPr>
+      <p:grpSpPr>
+        <a:xfrm>
+          <a:off x="0" y="0"/>
+          <a:ext cx="0" cy="0"/>
+          <a:chOff x="0" y="0"/>
+          <a:chExt cx="0" cy="0"/>
+        </a:xfrm>
+      </p:grpSpPr>
+      <p:sp>
+        <p:nvSpPr>
+          <p:cNvPr id="4" name="Text Placeholder 3"/>
+          <p:cNvSpPr>
+            <a:spLocks noGrp="1"/>
+          </p:cNvSpPr>
+          <p:nvPr>
+            <p:ph idx="2" sz="half" type="body"/>
+          </p:nvPr>
+        </p:nvSpPr>
+        <p:spPr/>
+        <p:txBody>
+          <a:bodyPr/>
+          <a:lstStyle/>
+          <a:p>
+            <a:pPr lvl="0" indent="0" marL="0">
+              <a:spcBef>
+                <a:spcPts val="3000"/>
+              </a:spcBef>
+              <a:buNone/>
+            </a:pPr>
+            <a:r>
+              <a:rPr b="1"/>
+              <a:t>4.6. Лишим владельца файла ~/feathers права на чтение:</a:t>
+            </a:r>
+          </a:p>
+        </p:txBody>
+      </p:sp>
+      <p:pic>
+        <p:nvPicPr>
+          <p:cNvPr descr="image/16.png" id="0" name="Picture 1"/>
+          <p:cNvPicPr>
+            <a:picLocks noGrp="1" noChangeAspect="1"/>
+          </p:cNvPicPr>
+          <p:nvPr/>
+        </p:nvPicPr>
+        <p:blipFill>
+          <a:blip r:embed="rId2"/>
+          <a:stretch>
+            <a:fillRect/>
+          </a:stretch>
+        </p:blipFill>
+        <p:spPr bwMode="auto">
+          <a:xfrm>
+            <a:off x="3568700" y="2006600"/>
+            <a:ext cx="5105400" cy="266700"/>
+          </a:xfrm>
+          <a:prstGeom prst="rect">
+            <a:avLst/>
+          </a:prstGeom>
+          <a:noFill/>
+          <a:ln w="9525">
+            <a:noFill/>
+            <a:headEnd/>
+            <a:tailEnd/>
+          </a:ln>
+        </p:spPr>
+      </p:pic>
+      <p:sp>
+        <p:nvSpPr>
+          <p:cNvPr id="1" name="TextBox 3"/>
+          <p:cNvSpPr txBox="1"/>
+          <p:nvPr/>
+        </p:nvSpPr>
+        <p:spPr>
+          <a:xfrm>
+            <a:off x="3568700" y="4076700"/>
+            <a:ext cx="5105400" cy="508000"/>
+          </a:xfrm>
+          <a:prstGeom prst="rect">
+            <a:avLst/>
+          </a:prstGeom>
+          <a:noFill/>
+        </p:spPr>
+        <p:txBody>
+          <a:bodyPr/>
+          <a:lstStyle/>
+          <a:p>
+            <a:pPr lvl="0" indent="0" marL="0" algn="ctr">
+              <a:buNone/>
+            </a:pPr>
+            <a:r>
+              <a:rPr/>
+              <a:t>Рисунок 16: Лишение права на чтение</a:t>
+            </a:r>
+          </a:p>
+        </p:txBody>
+      </p:sp>
+    </p:spTree>
+  </p:cSld>
+</p:sld>
+</file>
+
+<file path=ppt/slides/slide27.xml><?xml version="1.0" encoding="utf-8"?>
+<p:sld xmlns:a="http://schemas.openxmlformats.org/drawingml/2006/main" xmlns:r="http://schemas.openxmlformats.org/officeDocument/2006/relationships" xmlns:p="http://schemas.openxmlformats.org/presentationml/2006/main">
+  <p:cSld>
+    <p:spTree>
+      <p:nvGrpSpPr>
+        <p:cNvPr id="1" name=""/>
+        <p:cNvGrpSpPr/>
+        <p:nvPr/>
+      </p:nvGrpSpPr>
+      <p:grpSpPr>
+        <a:xfrm>
+          <a:off x="0" y="0"/>
+          <a:ext cx="0" cy="0"/>
+          <a:chOff x="0" y="0"/>
+          <a:chExt cx="0" cy="0"/>
+        </a:xfrm>
+      </p:grpSpPr>
+      <p:sp>
+        <p:nvSpPr>
+          <p:cNvPr id="4" name="Text Placeholder 3"/>
+          <p:cNvSpPr>
+            <a:spLocks noGrp="1"/>
+          </p:cNvSpPr>
+          <p:nvPr>
+            <p:ph idx="2" sz="half" type="body"/>
+          </p:nvPr>
+        </p:nvSpPr>
+        <p:spPr/>
+        <p:txBody>
+          <a:bodyPr/>
+          <a:lstStyle/>
+          <a:p>
+            <a:pPr lvl="0" indent="0" marL="0">
+              <a:spcBef>
+                <a:spcPts val="3000"/>
+              </a:spcBef>
+              <a:buNone/>
+            </a:pPr>
+            <a:r>
+              <a:rPr b="1"/>
+              <a:t>4.7. Попытаетемся просмотреть файл ~/feathers командой cat:</a:t>
+            </a:r>
+          </a:p>
+        </p:txBody>
+      </p:sp>
+      <p:pic>
+        <p:nvPicPr>
+          <p:cNvPr descr="image/17.png" id="0" name="Picture 1"/>
+          <p:cNvPicPr>
+            <a:picLocks noGrp="1" noChangeAspect="1"/>
+          </p:cNvPicPr>
+          <p:nvPr/>
+        </p:nvPicPr>
+        <p:blipFill>
+          <a:blip r:embed="rId2"/>
+          <a:stretch>
+            <a:fillRect/>
+          </a:stretch>
+        </p:blipFill>
+        <p:spPr bwMode="auto">
+          <a:xfrm>
+            <a:off x="3568700" y="1879600"/>
+            <a:ext cx="5105400" cy="508000"/>
+          </a:xfrm>
+          <a:prstGeom prst="rect">
+            <a:avLst/>
+          </a:prstGeom>
+          <a:noFill/>
+          <a:ln w="9525">
+            <a:noFill/>
+            <a:headEnd/>
+            <a:tailEnd/>
+          </a:ln>
+        </p:spPr>
+      </p:pic>
+      <p:sp>
+        <p:nvSpPr>
+          <p:cNvPr id="1" name="TextBox 3"/>
+          <p:cNvSpPr txBox="1"/>
+          <p:nvPr/>
+        </p:nvSpPr>
+        <p:spPr>
+          <a:xfrm>
+            <a:off x="3568700" y="4076700"/>
+            <a:ext cx="5105400" cy="508000"/>
+          </a:xfrm>
+          <a:prstGeom prst="rect">
+            <a:avLst/>
+          </a:prstGeom>
+          <a:noFill/>
+        </p:spPr>
+        <p:txBody>
+          <a:bodyPr/>
+          <a:lstStyle/>
+          <a:p>
+            <a:pPr lvl="0" indent="0" marL="0" algn="ctr">
+              <a:buNone/>
+            </a:pPr>
+            <a:r>
+              <a:rPr/>
+              <a:t>Рисунок 17: Попытка просмотра файла</a:t>
+            </a:r>
+          </a:p>
+        </p:txBody>
+      </p:sp>
+    </p:spTree>
+  </p:cSld>
+</p:sld>
+</file>
+
+<file path=ppt/slides/slide28.xml><?xml version="1.0" encoding="utf-8"?>
+<p:sld xmlns:a="http://schemas.openxmlformats.org/drawingml/2006/main" xmlns:r="http://schemas.openxmlformats.org/officeDocument/2006/relationships" xmlns:p="http://schemas.openxmlformats.org/presentationml/2006/main">
+  <p:cSld>
+    <p:spTree>
+      <p:nvGrpSpPr>
+        <p:cNvPr id="1" name=""/>
+        <p:cNvGrpSpPr/>
+        <p:nvPr/>
+      </p:nvGrpSpPr>
+      <p:grpSpPr>
+        <a:xfrm>
+          <a:off x="0" y="0"/>
+          <a:ext cx="0" cy="0"/>
+          <a:chOff x="0" y="0"/>
+          <a:chExt cx="0" cy="0"/>
+        </a:xfrm>
+      </p:grpSpPr>
+      <p:sp>
+        <p:nvSpPr>
+          <p:cNvPr id="4" name="Text Placeholder 3"/>
+          <p:cNvSpPr>
+            <a:spLocks noGrp="1"/>
+          </p:cNvSpPr>
+          <p:nvPr>
+            <p:ph idx="2" sz="half" type="body"/>
+          </p:nvPr>
+        </p:nvSpPr>
+        <p:spPr/>
+        <p:txBody>
+          <a:bodyPr/>
+          <a:lstStyle/>
+          <a:p>
+            <a:pPr lvl="0" indent="0" marL="0">
+              <a:spcBef>
+                <a:spcPts val="3000"/>
+              </a:spcBef>
+              <a:buNone/>
+            </a:pPr>
+            <a:r>
+              <a:rPr b="1"/>
+              <a:t>4.8. Попытаемся скопировать файл ~/feathers:</a:t>
+            </a:r>
+          </a:p>
+        </p:txBody>
+      </p:sp>
+      <p:pic>
+        <p:nvPicPr>
+          <p:cNvPr descr="image/18.png" id="0" name="Picture 1"/>
+          <p:cNvPicPr>
+            <a:picLocks noGrp="1" noChangeAspect="1"/>
+          </p:cNvPicPr>
+          <p:nvPr/>
+        </p:nvPicPr>
+        <p:blipFill>
+          <a:blip r:embed="rId2"/>
+          <a:stretch>
+            <a:fillRect/>
+          </a:stretch>
+        </p:blipFill>
+        <p:spPr bwMode="auto">
+          <a:xfrm>
+            <a:off x="3568700" y="1981200"/>
+            <a:ext cx="5105400" cy="304800"/>
+          </a:xfrm>
+          <a:prstGeom prst="rect">
+            <a:avLst/>
+          </a:prstGeom>
+          <a:noFill/>
+          <a:ln w="9525">
+            <a:noFill/>
+            <a:headEnd/>
+            <a:tailEnd/>
+          </a:ln>
+        </p:spPr>
+      </p:pic>
+      <p:sp>
+        <p:nvSpPr>
+          <p:cNvPr id="1" name="TextBox 3"/>
+          <p:cNvSpPr txBox="1"/>
+          <p:nvPr/>
+        </p:nvSpPr>
+        <p:spPr>
+          <a:xfrm>
+            <a:off x="3568700" y="4076700"/>
+            <a:ext cx="5105400" cy="508000"/>
+          </a:xfrm>
+          <a:prstGeom prst="rect">
+            <a:avLst/>
+          </a:prstGeom>
+          <a:noFill/>
+        </p:spPr>
+        <p:txBody>
+          <a:bodyPr/>
+          <a:lstStyle/>
+          <a:p>
+            <a:pPr lvl="0" indent="0" marL="0" algn="ctr">
+              <a:buNone/>
+            </a:pPr>
+            <a:r>
+              <a:rPr/>
+              <a:t>Рисунок 18: Попытка копирования файла</a:t>
+            </a:r>
+          </a:p>
+        </p:txBody>
+      </p:sp>
+    </p:spTree>
+  </p:cSld>
+</p:sld>
+</file>
+
+<file path=ppt/slides/slide29.xml><?xml version="1.0" encoding="utf-8"?>
+<p:sld xmlns:a="http://schemas.openxmlformats.org/drawingml/2006/main" xmlns:r="http://schemas.openxmlformats.org/officeDocument/2006/relationships" xmlns:p="http://schemas.openxmlformats.org/presentationml/2006/main">
+  <p:cSld>
+    <p:spTree>
+      <p:nvGrpSpPr>
+        <p:cNvPr id="1" name=""/>
+        <p:cNvGrpSpPr/>
+        <p:nvPr/>
+      </p:nvGrpSpPr>
+      <p:grpSpPr>
+        <a:xfrm>
+          <a:off x="0" y="0"/>
+          <a:ext cx="0" cy="0"/>
+          <a:chOff x="0" y="0"/>
+          <a:chExt cx="0" cy="0"/>
+        </a:xfrm>
+      </p:grpSpPr>
+      <p:sp>
+        <p:nvSpPr>
+          <p:cNvPr id="4" name="Text Placeholder 3"/>
+          <p:cNvSpPr>
+            <a:spLocks noGrp="1"/>
+          </p:cNvSpPr>
+          <p:nvPr>
+            <p:ph idx="2" sz="half" type="body"/>
+          </p:nvPr>
+        </p:nvSpPr>
+        <p:spPr/>
+        <p:txBody>
+          <a:bodyPr/>
+          <a:lstStyle/>
+          <a:p>
+            <a:pPr lvl="0" indent="0" marL="0">
+              <a:spcBef>
+                <a:spcPts val="3000"/>
+              </a:spcBef>
+              <a:buNone/>
+            </a:pPr>
+            <a:r>
+              <a:rPr b="1"/>
+              <a:t>4.9. Вернем владельцу файла ~/feathers право на чтение:</a:t>
+            </a:r>
+          </a:p>
+        </p:txBody>
+      </p:sp>
+      <p:pic>
+        <p:nvPicPr>
+          <p:cNvPr descr="image/19.png" id="0" name="Picture 1"/>
+          <p:cNvPicPr>
+            <a:picLocks noGrp="1" noChangeAspect="1"/>
+          </p:cNvPicPr>
+          <p:nvPr/>
+        </p:nvPicPr>
+        <p:blipFill>
+          <a:blip r:embed="rId2"/>
+          <a:stretch>
+            <a:fillRect/>
+          </a:stretch>
+        </p:blipFill>
+        <p:spPr bwMode="auto">
+          <a:xfrm>
+            <a:off x="3568700" y="1968500"/>
+            <a:ext cx="5105400" cy="355600"/>
+          </a:xfrm>
+          <a:prstGeom prst="rect">
+            <a:avLst/>
+          </a:prstGeom>
+          <a:noFill/>
+          <a:ln w="9525">
+            <a:noFill/>
+            <a:headEnd/>
+            <a:tailEnd/>
+          </a:ln>
+        </p:spPr>
+      </p:pic>
+      <p:sp>
+        <p:nvSpPr>
+          <p:cNvPr id="1" name="TextBox 3"/>
+          <p:cNvSpPr txBox="1"/>
+          <p:nvPr/>
+        </p:nvSpPr>
+        <p:spPr>
+          <a:xfrm>
+            <a:off x="3568700" y="4076700"/>
+            <a:ext cx="5105400" cy="508000"/>
+          </a:xfrm>
+          <a:prstGeom prst="rect">
+            <a:avLst/>
+          </a:prstGeom>
+          <a:noFill/>
+        </p:spPr>
+        <p:txBody>
+          <a:bodyPr/>
+          <a:lstStyle/>
+          <a:p>
+            <a:pPr lvl="0" indent="0" marL="0" algn="ctr">
+              <a:buNone/>
+            </a:pPr>
+            <a:r>
+              <a:rPr/>
+              <a:t>Рисунок 19: Возвращение прав</a:t>
             </a:r>
           </a:p>
         </p:txBody>
@@ -5319,446 +5552,6 @@
             </a:pPr>
             <a:r>
               <a:rPr b="1"/>
-              <a:t>4.6. Лишим владельца файла ~/feathers права на чтение:</a:t>
-            </a:r>
-          </a:p>
-        </p:txBody>
-      </p:sp>
-      <p:pic>
-        <p:nvPicPr>
-          <p:cNvPr descr="image/16.png" id="0" name="Picture 1"/>
-          <p:cNvPicPr>
-            <a:picLocks noGrp="1" noChangeAspect="1"/>
-          </p:cNvPicPr>
-          <p:nvPr/>
-        </p:nvPicPr>
-        <p:blipFill>
-          <a:blip r:embed="rId2"/>
-          <a:stretch>
-            <a:fillRect/>
-          </a:stretch>
-        </p:blipFill>
-        <p:spPr bwMode="auto">
-          <a:xfrm>
-            <a:off x="3568700" y="2006600"/>
-            <a:ext cx="5105400" cy="266700"/>
-          </a:xfrm>
-          <a:prstGeom prst="rect">
-            <a:avLst/>
-          </a:prstGeom>
-          <a:noFill/>
-          <a:ln w="9525">
-            <a:noFill/>
-            <a:headEnd/>
-            <a:tailEnd/>
-          </a:ln>
-        </p:spPr>
-      </p:pic>
-      <p:sp>
-        <p:nvSpPr>
-          <p:cNvPr id="1" name="TextBox 3"/>
-          <p:cNvSpPr txBox="1"/>
-          <p:nvPr/>
-        </p:nvSpPr>
-        <p:spPr>
-          <a:xfrm>
-            <a:off x="3568700" y="4076700"/>
-            <a:ext cx="5105400" cy="508000"/>
-          </a:xfrm>
-          <a:prstGeom prst="rect">
-            <a:avLst/>
-          </a:prstGeom>
-          <a:noFill/>
-        </p:spPr>
-        <p:txBody>
-          <a:bodyPr/>
-          <a:lstStyle/>
-          <a:p>
-            <a:pPr lvl="0" indent="0" marL="0" algn="ctr">
-              <a:buNone/>
-            </a:pPr>
-            <a:r>
-              <a:rPr/>
-              <a:t>Рисунок 16: Лишение права на чтение</a:t>
-            </a:r>
-          </a:p>
-        </p:txBody>
-      </p:sp>
-    </p:spTree>
-  </p:cSld>
-</p:sld>
-</file>
-
-<file path=ppt/slides/slide31.xml><?xml version="1.0" encoding="utf-8"?>
-<p:sld xmlns:a="http://schemas.openxmlformats.org/drawingml/2006/main" xmlns:r="http://schemas.openxmlformats.org/officeDocument/2006/relationships" xmlns:p="http://schemas.openxmlformats.org/presentationml/2006/main">
-  <p:cSld>
-    <p:spTree>
-      <p:nvGrpSpPr>
-        <p:cNvPr id="1" name=""/>
-        <p:cNvGrpSpPr/>
-        <p:nvPr/>
-      </p:nvGrpSpPr>
-      <p:grpSpPr>
-        <a:xfrm>
-          <a:off x="0" y="0"/>
-          <a:ext cx="0" cy="0"/>
-          <a:chOff x="0" y="0"/>
-          <a:chExt cx="0" cy="0"/>
-        </a:xfrm>
-      </p:grpSpPr>
-      <p:sp>
-        <p:nvSpPr>
-          <p:cNvPr id="4" name="Text Placeholder 3"/>
-          <p:cNvSpPr>
-            <a:spLocks noGrp="1"/>
-          </p:cNvSpPr>
-          <p:nvPr>
-            <p:ph idx="2" sz="half" type="body"/>
-          </p:nvPr>
-        </p:nvSpPr>
-        <p:spPr/>
-        <p:txBody>
-          <a:bodyPr/>
-          <a:lstStyle/>
-          <a:p>
-            <a:pPr lvl="0" indent="0" marL="0">
-              <a:spcBef>
-                <a:spcPts val="3000"/>
-              </a:spcBef>
-              <a:buNone/>
-            </a:pPr>
-            <a:r>
-              <a:rPr b="1"/>
-              <a:t>4.7. Попытаетемся просмотреть файл ~/feathers командой cat:</a:t>
-            </a:r>
-          </a:p>
-        </p:txBody>
-      </p:sp>
-      <p:pic>
-        <p:nvPicPr>
-          <p:cNvPr descr="image/17.png" id="0" name="Picture 1"/>
-          <p:cNvPicPr>
-            <a:picLocks noGrp="1" noChangeAspect="1"/>
-          </p:cNvPicPr>
-          <p:nvPr/>
-        </p:nvPicPr>
-        <p:blipFill>
-          <a:blip r:embed="rId2"/>
-          <a:stretch>
-            <a:fillRect/>
-          </a:stretch>
-        </p:blipFill>
-        <p:spPr bwMode="auto">
-          <a:xfrm>
-            <a:off x="3568700" y="1879600"/>
-            <a:ext cx="5105400" cy="508000"/>
-          </a:xfrm>
-          <a:prstGeom prst="rect">
-            <a:avLst/>
-          </a:prstGeom>
-          <a:noFill/>
-          <a:ln w="9525">
-            <a:noFill/>
-            <a:headEnd/>
-            <a:tailEnd/>
-          </a:ln>
-        </p:spPr>
-      </p:pic>
-      <p:sp>
-        <p:nvSpPr>
-          <p:cNvPr id="1" name="TextBox 3"/>
-          <p:cNvSpPr txBox="1"/>
-          <p:nvPr/>
-        </p:nvSpPr>
-        <p:spPr>
-          <a:xfrm>
-            <a:off x="3568700" y="4076700"/>
-            <a:ext cx="5105400" cy="508000"/>
-          </a:xfrm>
-          <a:prstGeom prst="rect">
-            <a:avLst/>
-          </a:prstGeom>
-          <a:noFill/>
-        </p:spPr>
-        <p:txBody>
-          <a:bodyPr/>
-          <a:lstStyle/>
-          <a:p>
-            <a:pPr lvl="0" indent="0" marL="0" algn="ctr">
-              <a:buNone/>
-            </a:pPr>
-            <a:r>
-              <a:rPr/>
-              <a:t>Рисунок 17: Попытка просмотра файла</a:t>
-            </a:r>
-          </a:p>
-        </p:txBody>
-      </p:sp>
-    </p:spTree>
-  </p:cSld>
-</p:sld>
-</file>
-
-<file path=ppt/slides/slide32.xml><?xml version="1.0" encoding="utf-8"?>
-<p:sld xmlns:a="http://schemas.openxmlformats.org/drawingml/2006/main" xmlns:r="http://schemas.openxmlformats.org/officeDocument/2006/relationships" xmlns:p="http://schemas.openxmlformats.org/presentationml/2006/main">
-  <p:cSld>
-    <p:spTree>
-      <p:nvGrpSpPr>
-        <p:cNvPr id="1" name=""/>
-        <p:cNvGrpSpPr/>
-        <p:nvPr/>
-      </p:nvGrpSpPr>
-      <p:grpSpPr>
-        <a:xfrm>
-          <a:off x="0" y="0"/>
-          <a:ext cx="0" cy="0"/>
-          <a:chOff x="0" y="0"/>
-          <a:chExt cx="0" cy="0"/>
-        </a:xfrm>
-      </p:grpSpPr>
-      <p:sp>
-        <p:nvSpPr>
-          <p:cNvPr id="4" name="Text Placeholder 3"/>
-          <p:cNvSpPr>
-            <a:spLocks noGrp="1"/>
-          </p:cNvSpPr>
-          <p:nvPr>
-            <p:ph idx="2" sz="half" type="body"/>
-          </p:nvPr>
-        </p:nvSpPr>
-        <p:spPr/>
-        <p:txBody>
-          <a:bodyPr/>
-          <a:lstStyle/>
-          <a:p>
-            <a:pPr lvl="0" indent="0" marL="0">
-              <a:spcBef>
-                <a:spcPts val="3000"/>
-              </a:spcBef>
-              <a:buNone/>
-            </a:pPr>
-            <a:r>
-              <a:rPr b="1"/>
-              <a:t>4.8. Попытаемся скопировать файл ~/feathers:</a:t>
-            </a:r>
-          </a:p>
-        </p:txBody>
-      </p:sp>
-      <p:pic>
-        <p:nvPicPr>
-          <p:cNvPr descr="image/18.png" id="0" name="Picture 1"/>
-          <p:cNvPicPr>
-            <a:picLocks noGrp="1" noChangeAspect="1"/>
-          </p:cNvPicPr>
-          <p:nvPr/>
-        </p:nvPicPr>
-        <p:blipFill>
-          <a:blip r:embed="rId2"/>
-          <a:stretch>
-            <a:fillRect/>
-          </a:stretch>
-        </p:blipFill>
-        <p:spPr bwMode="auto">
-          <a:xfrm>
-            <a:off x="3568700" y="1981200"/>
-            <a:ext cx="5105400" cy="304800"/>
-          </a:xfrm>
-          <a:prstGeom prst="rect">
-            <a:avLst/>
-          </a:prstGeom>
-          <a:noFill/>
-          <a:ln w="9525">
-            <a:noFill/>
-            <a:headEnd/>
-            <a:tailEnd/>
-          </a:ln>
-        </p:spPr>
-      </p:pic>
-      <p:sp>
-        <p:nvSpPr>
-          <p:cNvPr id="1" name="TextBox 3"/>
-          <p:cNvSpPr txBox="1"/>
-          <p:nvPr/>
-        </p:nvSpPr>
-        <p:spPr>
-          <a:xfrm>
-            <a:off x="3568700" y="4076700"/>
-            <a:ext cx="5105400" cy="508000"/>
-          </a:xfrm>
-          <a:prstGeom prst="rect">
-            <a:avLst/>
-          </a:prstGeom>
-          <a:noFill/>
-        </p:spPr>
-        <p:txBody>
-          <a:bodyPr/>
-          <a:lstStyle/>
-          <a:p>
-            <a:pPr lvl="0" indent="0" marL="0" algn="ctr">
-              <a:buNone/>
-            </a:pPr>
-            <a:r>
-              <a:rPr/>
-              <a:t>Рисунок 18: Попытка копирования файла</a:t>
-            </a:r>
-          </a:p>
-        </p:txBody>
-      </p:sp>
-    </p:spTree>
-  </p:cSld>
-</p:sld>
-</file>
-
-<file path=ppt/slides/slide33.xml><?xml version="1.0" encoding="utf-8"?>
-<p:sld xmlns:a="http://schemas.openxmlformats.org/drawingml/2006/main" xmlns:r="http://schemas.openxmlformats.org/officeDocument/2006/relationships" xmlns:p="http://schemas.openxmlformats.org/presentationml/2006/main">
-  <p:cSld>
-    <p:spTree>
-      <p:nvGrpSpPr>
-        <p:cNvPr id="1" name=""/>
-        <p:cNvGrpSpPr/>
-        <p:nvPr/>
-      </p:nvGrpSpPr>
-      <p:grpSpPr>
-        <a:xfrm>
-          <a:off x="0" y="0"/>
-          <a:ext cx="0" cy="0"/>
-          <a:chOff x="0" y="0"/>
-          <a:chExt cx="0" cy="0"/>
-        </a:xfrm>
-      </p:grpSpPr>
-      <p:sp>
-        <p:nvSpPr>
-          <p:cNvPr id="4" name="Text Placeholder 3"/>
-          <p:cNvSpPr>
-            <a:spLocks noGrp="1"/>
-          </p:cNvSpPr>
-          <p:nvPr>
-            <p:ph idx="2" sz="half" type="body"/>
-          </p:nvPr>
-        </p:nvSpPr>
-        <p:spPr/>
-        <p:txBody>
-          <a:bodyPr/>
-          <a:lstStyle/>
-          <a:p>
-            <a:pPr lvl="0" indent="0" marL="0">
-              <a:spcBef>
-                <a:spcPts val="3000"/>
-              </a:spcBef>
-              <a:buNone/>
-            </a:pPr>
-            <a:r>
-              <a:rPr b="1"/>
-              <a:t>4.9. Вернем владельцу файла ~/feathers право на чтение:</a:t>
-            </a:r>
-          </a:p>
-        </p:txBody>
-      </p:sp>
-      <p:pic>
-        <p:nvPicPr>
-          <p:cNvPr descr="image/19.png" id="0" name="Picture 1"/>
-          <p:cNvPicPr>
-            <a:picLocks noGrp="1" noChangeAspect="1"/>
-          </p:cNvPicPr>
-          <p:nvPr/>
-        </p:nvPicPr>
-        <p:blipFill>
-          <a:blip r:embed="rId2"/>
-          <a:stretch>
-            <a:fillRect/>
-          </a:stretch>
-        </p:blipFill>
-        <p:spPr bwMode="auto">
-          <a:xfrm>
-            <a:off x="3568700" y="1968500"/>
-            <a:ext cx="5105400" cy="355600"/>
-          </a:xfrm>
-          <a:prstGeom prst="rect">
-            <a:avLst/>
-          </a:prstGeom>
-          <a:noFill/>
-          <a:ln w="9525">
-            <a:noFill/>
-            <a:headEnd/>
-            <a:tailEnd/>
-          </a:ln>
-        </p:spPr>
-      </p:pic>
-      <p:sp>
-        <p:nvSpPr>
-          <p:cNvPr id="1" name="TextBox 3"/>
-          <p:cNvSpPr txBox="1"/>
-          <p:nvPr/>
-        </p:nvSpPr>
-        <p:spPr>
-          <a:xfrm>
-            <a:off x="3568700" y="4076700"/>
-            <a:ext cx="5105400" cy="508000"/>
-          </a:xfrm>
-          <a:prstGeom prst="rect">
-            <a:avLst/>
-          </a:prstGeom>
-          <a:noFill/>
-        </p:spPr>
-        <p:txBody>
-          <a:bodyPr/>
-          <a:lstStyle/>
-          <a:p>
-            <a:pPr lvl="0" indent="0" marL="0" algn="ctr">
-              <a:buNone/>
-            </a:pPr>
-            <a:r>
-              <a:rPr/>
-              <a:t>Рисунок 19: Возвращение прав</a:t>
-            </a:r>
-          </a:p>
-        </p:txBody>
-      </p:sp>
-    </p:spTree>
-  </p:cSld>
-</p:sld>
-</file>
-
-<file path=ppt/slides/slide34.xml><?xml version="1.0" encoding="utf-8"?>
-<p:sld xmlns:a="http://schemas.openxmlformats.org/drawingml/2006/main" xmlns:r="http://schemas.openxmlformats.org/officeDocument/2006/relationships" xmlns:p="http://schemas.openxmlformats.org/presentationml/2006/main">
-  <p:cSld>
-    <p:spTree>
-      <p:nvGrpSpPr>
-        <p:cNvPr id="1" name=""/>
-        <p:cNvGrpSpPr/>
-        <p:nvPr/>
-      </p:nvGrpSpPr>
-      <p:grpSpPr>
-        <a:xfrm>
-          <a:off x="0" y="0"/>
-          <a:ext cx="0" cy="0"/>
-          <a:chOff x="0" y="0"/>
-          <a:chExt cx="0" cy="0"/>
-        </a:xfrm>
-      </p:grpSpPr>
-      <p:sp>
-        <p:nvSpPr>
-          <p:cNvPr id="4" name="Text Placeholder 3"/>
-          <p:cNvSpPr>
-            <a:spLocks noGrp="1"/>
-          </p:cNvSpPr>
-          <p:nvPr>
-            <p:ph idx="2" sz="half" type="body"/>
-          </p:nvPr>
-        </p:nvSpPr>
-        <p:spPr/>
-        <p:txBody>
-          <a:bodyPr/>
-          <a:lstStyle/>
-          <a:p>
-            <a:pPr lvl="0" indent="0" marL="0">
-              <a:spcBef>
-                <a:spcPts val="3000"/>
-              </a:spcBef>
-              <a:buNone/>
-            </a:pPr>
-            <a:r>
-              <a:rPr b="1"/>
               <a:t>4.10. Лишим владельца каталога ~/play права на выполнение:</a:t>
             </a:r>
           </a:p>
@@ -5829,7 +5622,7 @@
 </p:sld>
 </file>
 
-<file path=ppt/slides/slide35.xml><?xml version="1.0" encoding="utf-8"?>
+<file path=ppt/slides/slide31.xml><?xml version="1.0" encoding="utf-8"?>
 <p:sld xmlns:a="http://schemas.openxmlformats.org/drawingml/2006/main" xmlns:r="http://schemas.openxmlformats.org/officeDocument/2006/relationships" xmlns:p="http://schemas.openxmlformats.org/presentationml/2006/main">
   <p:cSld>
     <p:spTree>
@@ -5939,7 +5732,7 @@
 </p:sld>
 </file>
 
-<file path=ppt/slides/slide36.xml><?xml version="1.0" encoding="utf-8"?>
+<file path=ppt/slides/slide32.xml><?xml version="1.0" encoding="utf-8"?>
 <p:sld xmlns:a="http://schemas.openxmlformats.org/drawingml/2006/main" xmlns:r="http://schemas.openxmlformats.org/officeDocument/2006/relationships" xmlns:p="http://schemas.openxmlformats.org/presentationml/2006/main">
   <p:cSld>
     <p:spTree>
@@ -6049,7 +5842,7 @@
 </p:sld>
 </file>
 
-<file path=ppt/slides/slide37.xml><?xml version="1.0" encoding="utf-8"?>
+<file path=ppt/slides/slide33.xml><?xml version="1.0" encoding="utf-8"?>
 <p:sld xmlns:a="http://schemas.openxmlformats.org/drawingml/2006/main" xmlns:r="http://schemas.openxmlformats.org/officeDocument/2006/relationships" xmlns:p="http://schemas.openxmlformats.org/presentationml/2006/main">
   <p:cSld>
     <p:spTree>
@@ -6071,7 +5864,7 @@
 </p:sld>
 </file>
 
-<file path=ppt/slides/slide38.xml><?xml version="1.0" encoding="utf-8"?>
+<file path=ppt/slides/slide34.xml><?xml version="1.0" encoding="utf-8"?>
 <p:sld xmlns:a="http://schemas.openxmlformats.org/drawingml/2006/main" xmlns:r="http://schemas.openxmlformats.org/officeDocument/2006/relationships" xmlns:p="http://schemas.openxmlformats.org/presentationml/2006/main">
   <p:cSld>
     <p:spTree>
@@ -6118,7 +5911,7 @@
 </p:sld>
 </file>
 
-<file path=ppt/slides/slide39.xml><?xml version="1.0" encoding="utf-8"?>
+<file path=ppt/slides/slide35.xml><?xml version="1.0" encoding="utf-8"?>
 <p:sld xmlns:a="http://schemas.openxmlformats.org/drawingml/2006/main" xmlns:r="http://schemas.openxmlformats.org/officeDocument/2006/relationships" xmlns:p="http://schemas.openxmlformats.org/presentationml/2006/main">
   <p:cSld>
     <p:spTree>
@@ -6272,6 +6065,358 @@
 </p:sld>
 </file>
 
+<file path=ppt/slides/slide36.xml><?xml version="1.0" encoding="utf-8"?>
+<p:sld xmlns:a="http://schemas.openxmlformats.org/drawingml/2006/main" xmlns:r="http://schemas.openxmlformats.org/officeDocument/2006/relationships" xmlns:p="http://schemas.openxmlformats.org/presentationml/2006/main">
+  <p:cSld>
+    <p:spTree>
+      <p:nvGrpSpPr>
+        <p:cNvPr id="1" name=""/>
+        <p:cNvGrpSpPr/>
+        <p:nvPr/>
+      </p:nvGrpSpPr>
+      <p:grpSpPr>
+        <a:xfrm>
+          <a:off x="0" y="0"/>
+          <a:ext cx="0" cy="0"/>
+          <a:chOff x="0" y="0"/>
+          <a:chExt cx="0" cy="0"/>
+        </a:xfrm>
+      </p:grpSpPr>
+    </p:spTree>
+  </p:cSld>
+</p:sld>
+</file>
+
+<file path=ppt/slides/slide37.xml><?xml version="1.0" encoding="utf-8"?>
+<p:sld xmlns:a="http://schemas.openxmlformats.org/drawingml/2006/main" xmlns:r="http://schemas.openxmlformats.org/officeDocument/2006/relationships" xmlns:p="http://schemas.openxmlformats.org/presentationml/2006/main">
+  <p:cSld>
+    <p:spTree>
+      <p:nvGrpSpPr>
+        <p:cNvPr id="1" name=""/>
+        <p:cNvGrpSpPr/>
+        <p:nvPr/>
+      </p:nvGrpSpPr>
+      <p:grpSpPr>
+        <a:xfrm>
+          <a:off x="0" y="0"/>
+          <a:ext cx="0" cy="0"/>
+          <a:chOff x="0" y="0"/>
+          <a:chExt cx="0" cy="0"/>
+        </a:xfrm>
+      </p:grpSpPr>
+      <p:sp>
+        <p:nvSpPr>
+          <p:cNvPr id="2" name="Title 1"/>
+          <p:cNvSpPr>
+            <a:spLocks noGrp="1"/>
+          </p:cNvSpPr>
+          <p:nvPr>
+            <p:ph type="title"/>
+          </p:nvPr>
+        </p:nvSpPr>
+        <p:spPr>
+          <a:xfrm>
+            <a:off x="457201" y="204787"/>
+            <a:ext cx="3008313" cy="871538"/>
+          </a:xfrm>
+        </p:spPr>
+        <p:txBody>
+          <a:bodyPr/>
+          <a:lstStyle/>
+          <a:p>
+            <a:pPr lvl="0" indent="0" marL="0">
+              <a:buNone/>
+            </a:pPr>
+            <a:r>
+              <a:rPr/>
+              <a:t>fsck</a:t>
+            </a:r>
+          </a:p>
+        </p:txBody>
+      </p:sp>
+      <p:sp>
+        <p:nvSpPr>
+          <p:cNvPr id="4" name="Text Placeholder 3"/>
+          <p:cNvSpPr>
+            <a:spLocks noGrp="1"/>
+          </p:cNvSpPr>
+          <p:nvPr>
+            <p:ph idx="2" sz="half" type="body"/>
+          </p:nvPr>
+        </p:nvSpPr>
+        <p:spPr/>
+        <p:txBody>
+          <a:bodyPr/>
+          <a:lstStyle/>
+          <a:p>
+            <a:pPr lvl="0" indent="0" marL="0">
+              <a:buNone/>
+            </a:pPr>
+            <a:r>
+              <a:rPr b="1"/>
+              <a:t>Назначение:</a:t>
+            </a:r>
+            <a:r>
+              <a:rPr/>
+              <a:t> проверка и восстановление целостности файловой системы.</a:t>
+            </a:r>
+          </a:p>
+          <a:p>
+            <a:pPr lvl="0" indent="0" marL="0">
+              <a:buNone/>
+            </a:pPr>
+            <a:r>
+              <a:rPr b="1"/>
+              <a:t>Пример:</a:t>
+            </a:r>
+            <a:r>
+              <a:rPr/>
+              <a:t> ```bash fsck /dev/sda1</a:t>
+            </a:r>
+          </a:p>
+        </p:txBody>
+      </p:sp>
+      <p:pic>
+        <p:nvPicPr>
+          <p:cNvPr descr="image/24.png" id="0" name="Picture 1"/>
+          <p:cNvPicPr>
+            <a:picLocks noGrp="1" noChangeAspect="1"/>
+          </p:cNvPicPr>
+          <p:nvPr/>
+        </p:nvPicPr>
+        <p:blipFill>
+          <a:blip r:embed="rId2"/>
+          <a:stretch>
+            <a:fillRect/>
+          </a:stretch>
+        </p:blipFill>
+        <p:spPr bwMode="auto">
+          <a:xfrm>
+            <a:off x="3568700" y="787400"/>
+            <a:ext cx="5105400" cy="2705100"/>
+          </a:xfrm>
+          <a:prstGeom prst="rect">
+            <a:avLst/>
+          </a:prstGeom>
+          <a:noFill/>
+          <a:ln w="9525">
+            <a:noFill/>
+            <a:headEnd/>
+            <a:tailEnd/>
+          </a:ln>
+        </p:spPr>
+      </p:pic>
+      <p:sp>
+        <p:nvSpPr>
+          <p:cNvPr id="1" name="TextBox 3"/>
+          <p:cNvSpPr txBox="1"/>
+          <p:nvPr/>
+        </p:nvSpPr>
+        <p:spPr>
+          <a:xfrm>
+            <a:off x="3568700" y="4076700"/>
+            <a:ext cx="5105400" cy="508000"/>
+          </a:xfrm>
+          <a:prstGeom prst="rect">
+            <a:avLst/>
+          </a:prstGeom>
+          <a:noFill/>
+        </p:spPr>
+        <p:txBody>
+          <a:bodyPr/>
+          <a:lstStyle/>
+          <a:p>
+            <a:pPr lvl="0" indent="0" marL="0" algn="ctr">
+              <a:buNone/>
+            </a:pPr>
+            <a:r>
+              <a:rPr/>
+              <a:t>Рисунок 24: Характеристика команды</a:t>
+            </a:r>
+          </a:p>
+        </p:txBody>
+      </p:sp>
+    </p:spTree>
+  </p:cSld>
+</p:sld>
+</file>
+
+<file path=ppt/slides/slide38.xml><?xml version="1.0" encoding="utf-8"?>
+<p:sld xmlns:a="http://schemas.openxmlformats.org/drawingml/2006/main" xmlns:r="http://schemas.openxmlformats.org/officeDocument/2006/relationships" xmlns:p="http://schemas.openxmlformats.org/presentationml/2006/main">
+  <p:cSld>
+    <p:spTree>
+      <p:nvGrpSpPr>
+        <p:cNvPr id="1" name=""/>
+        <p:cNvGrpSpPr/>
+        <p:nvPr/>
+      </p:nvGrpSpPr>
+      <p:grpSpPr>
+        <a:xfrm>
+          <a:off x="0" y="0"/>
+          <a:ext cx="0" cy="0"/>
+          <a:chOff x="0" y="0"/>
+          <a:chExt cx="0" cy="0"/>
+        </a:xfrm>
+      </p:grpSpPr>
+    </p:spTree>
+  </p:cSld>
+</p:sld>
+</file>
+
+<file path=ppt/slides/slide39.xml><?xml version="1.0" encoding="utf-8"?>
+<p:sld xmlns:a="http://schemas.openxmlformats.org/drawingml/2006/main" xmlns:r="http://schemas.openxmlformats.org/officeDocument/2006/relationships" xmlns:p="http://schemas.openxmlformats.org/presentationml/2006/main">
+  <p:cSld>
+    <p:spTree>
+      <p:nvGrpSpPr>
+        <p:cNvPr id="1" name=""/>
+        <p:cNvGrpSpPr/>
+        <p:nvPr/>
+      </p:nvGrpSpPr>
+      <p:grpSpPr>
+        <a:xfrm>
+          <a:off x="0" y="0"/>
+          <a:ext cx="0" cy="0"/>
+          <a:chOff x="0" y="0"/>
+          <a:chExt cx="0" cy="0"/>
+        </a:xfrm>
+      </p:grpSpPr>
+      <p:sp>
+        <p:nvSpPr>
+          <p:cNvPr id="2" name="Title 1"/>
+          <p:cNvSpPr>
+            <a:spLocks noGrp="1"/>
+          </p:cNvSpPr>
+          <p:nvPr>
+            <p:ph type="title"/>
+          </p:nvPr>
+        </p:nvSpPr>
+        <p:spPr>
+          <a:xfrm>
+            <a:off x="457201" y="204787"/>
+            <a:ext cx="3008313" cy="871538"/>
+          </a:xfrm>
+        </p:spPr>
+        <p:txBody>
+          <a:bodyPr/>
+          <a:lstStyle/>
+          <a:p>
+            <a:pPr lvl="0" indent="0" marL="0">
+              <a:buNone/>
+            </a:pPr>
+            <a:r>
+              <a:rPr/>
+              <a:t>mkfs</a:t>
+            </a:r>
+          </a:p>
+        </p:txBody>
+      </p:sp>
+      <p:sp>
+        <p:nvSpPr>
+          <p:cNvPr id="4" name="Text Placeholder 3"/>
+          <p:cNvSpPr>
+            <a:spLocks noGrp="1"/>
+          </p:cNvSpPr>
+          <p:nvPr>
+            <p:ph idx="2" sz="half" type="body"/>
+          </p:nvPr>
+        </p:nvSpPr>
+        <p:spPr/>
+        <p:txBody>
+          <a:bodyPr/>
+          <a:lstStyle/>
+          <a:p>
+            <a:pPr lvl="0" indent="0" marL="0">
+              <a:buNone/>
+            </a:pPr>
+            <a:r>
+              <a:rPr b="1"/>
+              <a:t>Назначение:</a:t>
+            </a:r>
+            <a:r>
+              <a:rPr/>
+              <a:t> создание файловой системы (форматирование раздела).</a:t>
+            </a:r>
+          </a:p>
+          <a:p>
+            <a:pPr lvl="0" indent="0" marL="0">
+              <a:buNone/>
+            </a:pPr>
+            <a:r>
+              <a:rPr b="1"/>
+              <a:t>Пример:</a:t>
+            </a:r>
+            <a:r>
+              <a:rPr/>
+              <a:t> ```bash mkfs.ext4 /dev/sdb1</a:t>
+            </a:r>
+          </a:p>
+        </p:txBody>
+      </p:sp>
+      <p:pic>
+        <p:nvPicPr>
+          <p:cNvPr descr="image/25.png" id="0" name="Picture 1"/>
+          <p:cNvPicPr>
+            <a:picLocks noGrp="1" noChangeAspect="1"/>
+          </p:cNvPicPr>
+          <p:nvPr/>
+        </p:nvPicPr>
+        <p:blipFill>
+          <a:blip r:embed="rId2"/>
+          <a:stretch>
+            <a:fillRect/>
+          </a:stretch>
+        </p:blipFill>
+        <p:spPr bwMode="auto">
+          <a:xfrm>
+            <a:off x="3568700" y="800100"/>
+            <a:ext cx="5105400" cy="2667000"/>
+          </a:xfrm>
+          <a:prstGeom prst="rect">
+            <a:avLst/>
+          </a:prstGeom>
+          <a:noFill/>
+          <a:ln w="9525">
+            <a:noFill/>
+            <a:headEnd/>
+            <a:tailEnd/>
+          </a:ln>
+        </p:spPr>
+      </p:pic>
+      <p:sp>
+        <p:nvSpPr>
+          <p:cNvPr id="1" name="TextBox 3"/>
+          <p:cNvSpPr txBox="1"/>
+          <p:nvPr/>
+        </p:nvSpPr>
+        <p:spPr>
+          <a:xfrm>
+            <a:off x="3568700" y="4076700"/>
+            <a:ext cx="5105400" cy="508000"/>
+          </a:xfrm>
+          <a:prstGeom prst="rect">
+            <a:avLst/>
+          </a:prstGeom>
+          <a:noFill/>
+        </p:spPr>
+        <p:txBody>
+          <a:bodyPr/>
+          <a:lstStyle/>
+          <a:p>
+            <a:pPr lvl="0" indent="0" marL="0" algn="ctr">
+              <a:buNone/>
+            </a:pPr>
+            <a:r>
+              <a:rPr/>
+              <a:t>Рисунок 25: Характеристика команды</a:t>
+            </a:r>
+          </a:p>
+        </p:txBody>
+      </p:sp>
+    </p:spTree>
+  </p:cSld>
+</p:sld>
+</file>
+
 <file path=ppt/slides/slide4.xml><?xml version="1.0" encoding="utf-8"?>
 <p:sld xmlns:a="http://schemas.openxmlformats.org/drawingml/2006/main" xmlns:r="http://schemas.openxmlformats.org/officeDocument/2006/relationships" xmlns:p="http://schemas.openxmlformats.org/presentationml/2006/main">
   <p:cSld>
@@ -6314,7 +6459,7 @@
             </a:pPr>
             <a:r>
               <a:rPr/>
-              <a:t>Вводная часть</a:t>
+              <a:t>Цель работы</a:t>
             </a:r>
           </a:p>
         </p:txBody>
@@ -6388,7 +6533,7 @@
             </a:pPr>
             <a:r>
               <a:rPr/>
-              <a:t>fsck</a:t>
+              <a:t>kill</a:t>
             </a:r>
           </a:p>
         </p:txBody>
@@ -6417,7 +6562,7 @@
             </a:r>
             <a:r>
               <a:rPr/>
-              <a:t> проверка и восстановление целостности файловой системы.</a:t>
+              <a:t> отправка сигналов процессам (завершение, остановка, перезапуск).</a:t>
             </a:r>
           </a:p>
           <a:p>
@@ -6430,14 +6575,14 @@
             </a:r>
             <a:r>
               <a:rPr/>
-              <a:t> ```bash fsck /dev/sda1</a:t>
+              <a:t> ```bash kill -9 1234</a:t>
             </a:r>
           </a:p>
         </p:txBody>
       </p:sp>
       <p:pic>
         <p:nvPicPr>
-          <p:cNvPr descr="image/24.png" id="0" name="Picture 1"/>
+          <p:cNvPr descr="image/26.png" id="0" name="Picture 1"/>
           <p:cNvPicPr>
             <a:picLocks noGrp="1" noChangeAspect="1"/>
           </p:cNvPicPr>
@@ -6451,8 +6596,8 @@
         </p:blipFill>
         <p:spPr bwMode="auto">
           <a:xfrm>
-            <a:off x="3568700" y="787400"/>
-            <a:ext cx="5105400" cy="2705100"/>
+            <a:off x="3568700" y="800100"/>
+            <a:ext cx="5105400" cy="2679700"/>
           </a:xfrm>
           <a:prstGeom prst="rect">
             <a:avLst/>
@@ -6490,7 +6635,7 @@
             </a:pPr>
             <a:r>
               <a:rPr/>
-              <a:t>Рисунок 24: Характеристика команды</a:t>
+              <a:t>Рисунок 26: Характеристика команды</a:t>
             </a:r>
           </a:p>
         </p:txBody>
@@ -6551,8 +6696,8 @@
         </p:nvSpPr>
         <p:spPr>
           <a:xfrm>
-            <a:off x="457201" y="204787"/>
-            <a:ext cx="3008313" cy="871538"/>
+            <a:off x="722313" y="3305176"/>
+            <a:ext cx="7772400" cy="1021556"/>
           </a:xfrm>
         </p:spPr>
         <p:txBody>
@@ -6564,109 +6709,7 @@
             </a:pPr>
             <a:r>
               <a:rPr/>
-              <a:t>mkfs</a:t>
-            </a:r>
-          </a:p>
-        </p:txBody>
-      </p:sp>
-      <p:sp>
-        <p:nvSpPr>
-          <p:cNvPr id="4" name="Text Placeholder 3"/>
-          <p:cNvSpPr>
-            <a:spLocks noGrp="1"/>
-          </p:cNvSpPr>
-          <p:nvPr>
-            <p:ph idx="2" sz="half" type="body"/>
-          </p:nvPr>
-        </p:nvSpPr>
-        <p:spPr/>
-        <p:txBody>
-          <a:bodyPr/>
-          <a:lstStyle/>
-          <a:p>
-            <a:pPr lvl="0" indent="0" marL="0">
-              <a:buNone/>
-            </a:pPr>
-            <a:r>
-              <a:rPr b="1"/>
-              <a:t>Назначение:</a:t>
-            </a:r>
-            <a:r>
-              <a:rPr/>
-              <a:t> создание файловой системы (форматирование раздела).</a:t>
-            </a:r>
-          </a:p>
-          <a:p>
-            <a:pPr lvl="0" indent="0" marL="0">
-              <a:buNone/>
-            </a:pPr>
-            <a:r>
-              <a:rPr b="1"/>
-              <a:t>Пример:</a:t>
-            </a:r>
-            <a:r>
-              <a:rPr/>
-              <a:t> ```bash mkfs.ext4 /dev/sdb1</a:t>
-            </a:r>
-          </a:p>
-        </p:txBody>
-      </p:sp>
-      <p:pic>
-        <p:nvPicPr>
-          <p:cNvPr descr="image/25.png" id="0" name="Picture 1"/>
-          <p:cNvPicPr>
-            <a:picLocks noGrp="1" noChangeAspect="1"/>
-          </p:cNvPicPr>
-          <p:nvPr/>
-        </p:nvPicPr>
-        <p:blipFill>
-          <a:blip r:embed="rId2"/>
-          <a:stretch>
-            <a:fillRect/>
-          </a:stretch>
-        </p:blipFill>
-        <p:spPr bwMode="auto">
-          <a:xfrm>
-            <a:off x="3568700" y="800100"/>
-            <a:ext cx="5105400" cy="2667000"/>
-          </a:xfrm>
-          <a:prstGeom prst="rect">
-            <a:avLst/>
-          </a:prstGeom>
-          <a:noFill/>
-          <a:ln w="9525">
-            <a:noFill/>
-            <a:headEnd/>
-            <a:tailEnd/>
-          </a:ln>
-        </p:spPr>
-      </p:pic>
-      <p:sp>
-        <p:nvSpPr>
-          <p:cNvPr id="1" name="TextBox 3"/>
-          <p:cNvSpPr txBox="1"/>
-          <p:nvPr/>
-        </p:nvSpPr>
-        <p:spPr>
-          <a:xfrm>
-            <a:off x="3568700" y="4076700"/>
-            <a:ext cx="5105400" cy="508000"/>
-          </a:xfrm>
-          <a:prstGeom prst="rect">
-            <a:avLst/>
-          </a:prstGeom>
-          <a:noFill/>
-        </p:spPr>
-        <p:txBody>
-          <a:bodyPr/>
-          <a:lstStyle/>
-          <a:p>
-            <a:pPr lvl="0" indent="0" marL="0" algn="ctr">
-              <a:buNone/>
-            </a:pPr>
-            <a:r>
-              <a:rPr/>
-              <a:t>Рисунок 25: Характеристика команды</a:t>
+              <a:t>Контрольные вопросы</a:t>
             </a:r>
           </a:p>
         </p:txBody>
@@ -6693,6 +6736,130 @@
           <a:chExt cx="0" cy="0"/>
         </a:xfrm>
       </p:grpSpPr>
+      <p:sp>
+        <p:nvSpPr>
+          <p:cNvPr id="2" name="Title 1"/>
+          <p:cNvSpPr>
+            <a:spLocks noGrp="1"/>
+          </p:cNvSpPr>
+          <p:nvPr>
+            <p:ph type="title"/>
+          </p:nvPr>
+        </p:nvSpPr>
+        <p:spPr/>
+        <p:txBody>
+          <a:bodyPr/>
+          <a:lstStyle/>
+          <a:p>
+            <a:pPr lvl="0" indent="0" marL="0">
+              <a:buNone/>
+            </a:pPr>
+            <a:r>
+              <a:rPr/>
+              <a:t>1. Дайте характеристику каждой файловой системе, существующей на жёстком диске компьютера, на котором вы выполняли лабораторную работу.</a:t>
+            </a:r>
+          </a:p>
+        </p:txBody>
+      </p:sp>
+      <p:sp>
+        <p:nvSpPr>
+          <p:cNvPr id="3" name="Content Placeholder 2"/>
+          <p:cNvSpPr>
+            <a:spLocks noGrp="1"/>
+          </p:cNvSpPr>
+          <p:nvPr>
+            <p:ph idx="1"/>
+          </p:nvPr>
+        </p:nvSpPr>
+        <p:spPr/>
+        <p:txBody>
+          <a:bodyPr/>
+          <a:lstStyle/>
+          <a:p>
+            <a:pPr lvl="0" indent="0" marL="0">
+              <a:buNone/>
+            </a:pPr>
+            <a:r>
+              <a:rPr/>
+              <a:t>Файловые системы, которые могут присутствовать на жёстком диске:</a:t>
+            </a:r>
+          </a:p>
+          <a:p>
+            <a:pPr lvl="0"/>
+            <a:r>
+              <a:rPr b="1"/>
+              <a:t>ext4</a:t>
+            </a:r>
+            <a:r>
+              <a:rPr/>
+              <a:t> — стандартная файловая система для Linux. Поддерживает журналирование (восстановление после сбоев), большие файлы (до 16 ТБ) и разделы (до 1 ЭБ). Используется для корневого раздела и домашних каталогов.</a:t>
+            </a:r>
+          </a:p>
+          <a:p>
+            <a:pPr lvl="0"/>
+            <a:r>
+              <a:rPr b="1"/>
+              <a:t>swap</a:t>
+            </a:r>
+            <a:r>
+              <a:rPr/>
+              <a:t> — не файловая система в классическом понимании, а раздел подкачки. Используется для временного хранения данных при нехватке оперативной памяти.</a:t>
+            </a:r>
+          </a:p>
+          <a:p>
+            <a:pPr lvl="0"/>
+            <a:r>
+              <a:rPr b="1"/>
+              <a:t>EFI System Partition (ESP)</a:t>
+            </a:r>
+            <a:r>
+              <a:rPr/>
+              <a:t> — раздел с файловой системой FAT32, содержит загрузчики для UEFI.</a:t>
+            </a:r>
+          </a:p>
+          <a:p>
+            <a:pPr lvl="0"/>
+            <a:r>
+              <a:rPr b="1"/>
+              <a:t>tmpfs</a:t>
+            </a:r>
+            <a:r>
+              <a:rPr/>
+              <a:t> — временная файловая система в оперативной памяти, используется для </a:t>
+            </a:r>
+            <a:r>
+              <a:rPr>
+                <a:latin typeface="Courier"/>
+              </a:rPr>
+              <a:t>/tmp</a:t>
+            </a:r>
+            <a:r>
+              <a:rPr/>
+              <a:t>, </a:t>
+            </a:r>
+            <a:r>
+              <a:rPr>
+                <a:latin typeface="Courier"/>
+              </a:rPr>
+              <a:t>/run</a:t>
+            </a:r>
+            <a:r>
+              <a:rPr/>
+              <a:t>, </a:t>
+            </a:r>
+            <a:r>
+              <a:rPr>
+                <a:latin typeface="Courier"/>
+              </a:rPr>
+              <a:t>/dev/shm</a:t>
+            </a:r>
+            <a:r>
+              <a:rPr/>
+              <a:t>. Данные не сохраняются после перезагрузки.</a:t>
+            </a:r>
+          </a:p>
+        </p:txBody>
+      </p:sp>
     </p:spTree>
   </p:cSld>
 </p:sld>
@@ -6715,477 +6882,12 @@
           <a:chExt cx="0" cy="0"/>
         </a:xfrm>
       </p:grpSpPr>
-      <p:sp>
-        <p:nvSpPr>
-          <p:cNvPr id="2" name="Title 1"/>
-          <p:cNvSpPr>
-            <a:spLocks noGrp="1"/>
-          </p:cNvSpPr>
-          <p:nvPr>
-            <p:ph type="title"/>
-          </p:nvPr>
-        </p:nvSpPr>
-        <p:spPr>
-          <a:xfrm>
-            <a:off x="457201" y="204787"/>
-            <a:ext cx="3008313" cy="871538"/>
-          </a:xfrm>
-        </p:spPr>
-        <p:txBody>
-          <a:bodyPr/>
-          <a:lstStyle/>
-          <a:p>
-            <a:pPr lvl="0" indent="0" marL="0">
-              <a:buNone/>
-            </a:pPr>
-            <a:r>
-              <a:rPr/>
-              <a:t>kill</a:t>
-            </a:r>
-          </a:p>
-        </p:txBody>
-      </p:sp>
-      <p:sp>
-        <p:nvSpPr>
-          <p:cNvPr id="4" name="Text Placeholder 3"/>
-          <p:cNvSpPr>
-            <a:spLocks noGrp="1"/>
-          </p:cNvSpPr>
-          <p:nvPr>
-            <p:ph idx="2" sz="half" type="body"/>
-          </p:nvPr>
-        </p:nvSpPr>
-        <p:spPr/>
-        <p:txBody>
-          <a:bodyPr/>
-          <a:lstStyle/>
-          <a:p>
-            <a:pPr lvl="0" indent="0" marL="0">
-              <a:buNone/>
-            </a:pPr>
-            <a:r>
-              <a:rPr b="1"/>
-              <a:t>Назначение:</a:t>
-            </a:r>
-            <a:r>
-              <a:rPr/>
-              <a:t> отправка сигналов процессам (завершение, остановка, перезапуск).</a:t>
-            </a:r>
-          </a:p>
-          <a:p>
-            <a:pPr lvl="0" indent="0" marL="0">
-              <a:buNone/>
-            </a:pPr>
-            <a:r>
-              <a:rPr b="1"/>
-              <a:t>Пример:</a:t>
-            </a:r>
-            <a:r>
-              <a:rPr/>
-              <a:t> ```bash kill -9 1234</a:t>
-            </a:r>
-          </a:p>
-        </p:txBody>
-      </p:sp>
-      <p:pic>
-        <p:nvPicPr>
-          <p:cNvPr descr="image/26.png" id="0" name="Picture 1"/>
-          <p:cNvPicPr>
-            <a:picLocks noGrp="1" noChangeAspect="1"/>
-          </p:cNvPicPr>
-          <p:nvPr/>
-        </p:nvPicPr>
-        <p:blipFill>
-          <a:blip r:embed="rId2"/>
-          <a:stretch>
-            <a:fillRect/>
-          </a:stretch>
-        </p:blipFill>
-        <p:spPr bwMode="auto">
-          <a:xfrm>
-            <a:off x="3568700" y="800100"/>
-            <a:ext cx="5105400" cy="2679700"/>
-          </a:xfrm>
-          <a:prstGeom prst="rect">
-            <a:avLst/>
-          </a:prstGeom>
-          <a:noFill/>
-          <a:ln w="9525">
-            <a:noFill/>
-            <a:headEnd/>
-            <a:tailEnd/>
-          </a:ln>
-        </p:spPr>
-      </p:pic>
-      <p:sp>
-        <p:nvSpPr>
-          <p:cNvPr id="1" name="TextBox 3"/>
-          <p:cNvSpPr txBox="1"/>
-          <p:nvPr/>
-        </p:nvSpPr>
-        <p:spPr>
-          <a:xfrm>
-            <a:off x="3568700" y="4076700"/>
-            <a:ext cx="5105400" cy="508000"/>
-          </a:xfrm>
-          <a:prstGeom prst="rect">
-            <a:avLst/>
-          </a:prstGeom>
-          <a:noFill/>
-        </p:spPr>
-        <p:txBody>
-          <a:bodyPr/>
-          <a:lstStyle/>
-          <a:p>
-            <a:pPr lvl="0" indent="0" marL="0" algn="ctr">
-              <a:buNone/>
-            </a:pPr>
-            <a:r>
-              <a:rPr/>
-              <a:t>Рисунок 26: Характеристика команды</a:t>
-            </a:r>
-          </a:p>
-        </p:txBody>
-      </p:sp>
     </p:spTree>
   </p:cSld>
 </p:sld>
 </file>
 
 <file path=ppt/slides/slide46.xml><?xml version="1.0" encoding="utf-8"?>
-<p:sld xmlns:a="http://schemas.openxmlformats.org/drawingml/2006/main" xmlns:r="http://schemas.openxmlformats.org/officeDocument/2006/relationships" xmlns:p="http://schemas.openxmlformats.org/presentationml/2006/main">
-  <p:cSld>
-    <p:spTree>
-      <p:nvGrpSpPr>
-        <p:cNvPr id="1" name=""/>
-        <p:cNvGrpSpPr/>
-        <p:nvPr/>
-      </p:nvGrpSpPr>
-      <p:grpSpPr>
-        <a:xfrm>
-          <a:off x="0" y="0"/>
-          <a:ext cx="0" cy="0"/>
-          <a:chOff x="0" y="0"/>
-          <a:chExt cx="0" cy="0"/>
-        </a:xfrm>
-      </p:grpSpPr>
-    </p:spTree>
-  </p:cSld>
-</p:sld>
-</file>
-
-<file path=ppt/slides/slide47.xml><?xml version="1.0" encoding="utf-8"?>
-<p:sld xmlns:a="http://schemas.openxmlformats.org/drawingml/2006/main" xmlns:r="http://schemas.openxmlformats.org/officeDocument/2006/relationships" xmlns:p="http://schemas.openxmlformats.org/presentationml/2006/main">
-  <p:cSld>
-    <p:spTree>
-      <p:nvGrpSpPr>
-        <p:cNvPr id="1" name=""/>
-        <p:cNvGrpSpPr/>
-        <p:nvPr/>
-      </p:nvGrpSpPr>
-      <p:grpSpPr>
-        <a:xfrm>
-          <a:off x="0" y="0"/>
-          <a:ext cx="0" cy="0"/>
-          <a:chOff x="0" y="0"/>
-          <a:chExt cx="0" cy="0"/>
-        </a:xfrm>
-      </p:grpSpPr>
-      <p:sp>
-        <p:nvSpPr>
-          <p:cNvPr id="2" name="Title 1"/>
-          <p:cNvSpPr>
-            <a:spLocks noGrp="1"/>
-          </p:cNvSpPr>
-          <p:nvPr>
-            <p:ph type="title"/>
-          </p:nvPr>
-        </p:nvSpPr>
-        <p:spPr>
-          <a:xfrm>
-            <a:off x="722313" y="3305176"/>
-            <a:ext cx="7772400" cy="1021556"/>
-          </a:xfrm>
-        </p:spPr>
-        <p:txBody>
-          <a:bodyPr/>
-          <a:lstStyle/>
-          <a:p>
-            <a:pPr lvl="0" indent="0" marL="0">
-              <a:buNone/>
-            </a:pPr>
-            <a:r>
-              <a:rPr/>
-              <a:t>Контрольные вопросы</a:t>
-            </a:r>
-          </a:p>
-        </p:txBody>
-      </p:sp>
-    </p:spTree>
-  </p:cSld>
-</p:sld>
-</file>
-
-<file path=ppt/slides/slide48.xml><?xml version="1.0" encoding="utf-8"?>
-<p:sld xmlns:a="http://schemas.openxmlformats.org/drawingml/2006/main" xmlns:r="http://schemas.openxmlformats.org/officeDocument/2006/relationships" xmlns:p="http://schemas.openxmlformats.org/presentationml/2006/main">
-  <p:cSld>
-    <p:spTree>
-      <p:nvGrpSpPr>
-        <p:cNvPr id="1" name=""/>
-        <p:cNvGrpSpPr/>
-        <p:nvPr/>
-      </p:nvGrpSpPr>
-      <p:grpSpPr>
-        <a:xfrm>
-          <a:off x="0" y="0"/>
-          <a:ext cx="0" cy="0"/>
-          <a:chOff x="0" y="0"/>
-          <a:chExt cx="0" cy="0"/>
-        </a:xfrm>
-      </p:grpSpPr>
-      <p:sp>
-        <p:nvSpPr>
-          <p:cNvPr id="2" name="Title 1"/>
-          <p:cNvSpPr>
-            <a:spLocks noGrp="1"/>
-          </p:cNvSpPr>
-          <p:nvPr>
-            <p:ph type="title"/>
-          </p:nvPr>
-        </p:nvSpPr>
-        <p:spPr/>
-        <p:txBody>
-          <a:bodyPr/>
-          <a:lstStyle/>
-          <a:p>
-            <a:pPr lvl="0" indent="0" marL="0">
-              <a:buNone/>
-            </a:pPr>
-            <a:r>
-              <a:rPr/>
-              <a:t>1. Дайте характеристику каждой файловой системе, существующей на жёстком диске компьютера, на котором вы выполняли лабораторную работу.</a:t>
-            </a:r>
-          </a:p>
-        </p:txBody>
-      </p:sp>
-      <p:sp>
-        <p:nvSpPr>
-          <p:cNvPr id="3" name="Content Placeholder 2"/>
-          <p:cNvSpPr>
-            <a:spLocks noGrp="1"/>
-          </p:cNvSpPr>
-          <p:nvPr>
-            <p:ph idx="1"/>
-          </p:nvPr>
-        </p:nvSpPr>
-        <p:spPr/>
-        <p:txBody>
-          <a:bodyPr/>
-          <a:lstStyle/>
-          <a:p>
-            <a:pPr lvl="0" indent="0" marL="0">
-              <a:buNone/>
-            </a:pPr>
-            <a:r>
-              <a:rPr/>
-              <a:t>Файловые системы, которые могут присутствовать на жёстком диске:</a:t>
-            </a:r>
-          </a:p>
-          <a:p>
-            <a:pPr lvl="0"/>
-            <a:r>
-              <a:rPr b="1"/>
-              <a:t>ext4</a:t>
-            </a:r>
-            <a:r>
-              <a:rPr/>
-              <a:t> — стандартная файловая система для Linux. Поддерживает журналирование (восстановление после сбоев), большие файлы (до 16 ТБ) и разделы (до 1 ЭБ). Используется для корневого раздела и домашних каталогов.</a:t>
-            </a:r>
-          </a:p>
-          <a:p>
-            <a:pPr lvl="0"/>
-            <a:r>
-              <a:rPr b="1"/>
-              <a:t>swap</a:t>
-            </a:r>
-            <a:r>
-              <a:rPr/>
-              <a:t> — не файловая система в классическом понимании, а раздел подкачки. Используется для временного хранения данных при нехватке оперативной памяти.</a:t>
-            </a:r>
-          </a:p>
-          <a:p>
-            <a:pPr lvl="0"/>
-            <a:r>
-              <a:rPr b="1"/>
-              <a:t>EFI System Partition (ESP)</a:t>
-            </a:r>
-            <a:r>
-              <a:rPr/>
-              <a:t> — раздел с файловой системой FAT32, содержит загрузчики для UEFI.</a:t>
-            </a:r>
-          </a:p>
-          <a:p>
-            <a:pPr lvl="0"/>
-            <a:r>
-              <a:rPr b="1"/>
-              <a:t>tmpfs</a:t>
-            </a:r>
-            <a:r>
-              <a:rPr/>
-              <a:t> — временная файловая система в оперативной памяти, используется для </a:t>
-            </a:r>
-            <a:r>
-              <a:rPr>
-                <a:latin typeface="Courier"/>
-              </a:rPr>
-              <a:t>/tmp</a:t>
-            </a:r>
-            <a:r>
-              <a:rPr/>
-              <a:t>, </a:t>
-            </a:r>
-            <a:r>
-              <a:rPr>
-                <a:latin typeface="Courier"/>
-              </a:rPr>
-              <a:t>/run</a:t>
-            </a:r>
-            <a:r>
-              <a:rPr/>
-              <a:t>, </a:t>
-            </a:r>
-            <a:r>
-              <a:rPr>
-                <a:latin typeface="Courier"/>
-              </a:rPr>
-              <a:t>/dev/shm</a:t>
-            </a:r>
-            <a:r>
-              <a:rPr/>
-              <a:t>. Данные не сохраняются после перезагрузки.</a:t>
-            </a:r>
-          </a:p>
-        </p:txBody>
-      </p:sp>
-    </p:spTree>
-  </p:cSld>
-</p:sld>
-</file>
-
-<file path=ppt/slides/slide49.xml><?xml version="1.0" encoding="utf-8"?>
-<p:sld xmlns:a="http://schemas.openxmlformats.org/drawingml/2006/main" xmlns:r="http://schemas.openxmlformats.org/officeDocument/2006/relationships" xmlns:p="http://schemas.openxmlformats.org/presentationml/2006/main">
-  <p:cSld>
-    <p:spTree>
-      <p:nvGrpSpPr>
-        <p:cNvPr id="1" name=""/>
-        <p:cNvGrpSpPr/>
-        <p:nvPr/>
-      </p:nvGrpSpPr>
-      <p:grpSpPr>
-        <a:xfrm>
-          <a:off x="0" y="0"/>
-          <a:ext cx="0" cy="0"/>
-          <a:chOff x="0" y="0"/>
-          <a:chExt cx="0" cy="0"/>
-        </a:xfrm>
-      </p:grpSpPr>
-    </p:spTree>
-  </p:cSld>
-</p:sld>
-</file>
-
-<file path=ppt/slides/slide5.xml><?xml version="1.0" encoding="utf-8"?>
-<p:sld xmlns:a="http://schemas.openxmlformats.org/drawingml/2006/main" xmlns:r="http://schemas.openxmlformats.org/officeDocument/2006/relationships" xmlns:p="http://schemas.openxmlformats.org/presentationml/2006/main">
-  <p:cSld>
-    <p:spTree>
-      <p:nvGrpSpPr>
-        <p:cNvPr id="1" name=""/>
-        <p:cNvGrpSpPr/>
-        <p:nvPr/>
-      </p:nvGrpSpPr>
-      <p:grpSpPr>
-        <a:xfrm>
-          <a:off x="0" y="0"/>
-          <a:ext cx="0" cy="0"/>
-          <a:chOff x="0" y="0"/>
-          <a:chExt cx="0" cy="0"/>
-        </a:xfrm>
-      </p:grpSpPr>
-      <p:sp>
-        <p:nvSpPr>
-          <p:cNvPr id="2" name="Title 1"/>
-          <p:cNvSpPr>
-            <a:spLocks noGrp="1"/>
-          </p:cNvSpPr>
-          <p:nvPr>
-            <p:ph type="title"/>
-          </p:nvPr>
-        </p:nvSpPr>
-        <p:spPr/>
-        <p:txBody>
-          <a:bodyPr/>
-          <a:lstStyle/>
-          <a:p>
-            <a:pPr lvl="0" indent="0" marL="0">
-              <a:buNone/>
-            </a:pPr>
-            <a:r>
-              <a:rPr/>
-              <a:t>Актуальность</a:t>
-            </a:r>
-          </a:p>
-        </p:txBody>
-      </p:sp>
-      <p:sp>
-        <p:nvSpPr>
-          <p:cNvPr id="3" name="Content Placeholder 2"/>
-          <p:cNvSpPr>
-            <a:spLocks noGrp="1"/>
-          </p:cNvSpPr>
-          <p:nvPr>
-            <p:ph idx="1"/>
-          </p:nvPr>
-        </p:nvSpPr>
-        <p:spPr/>
-        <p:txBody>
-          <a:bodyPr/>
-          <a:lstStyle/>
-          <a:p>
-            <a:pPr lvl="0"/>
-            <a:r>
-              <a:rPr/>
-              <a:t>Важно донести результаты своих исследований до окружающих</a:t>
-            </a:r>
-          </a:p>
-          <a:p>
-            <a:pPr lvl="0"/>
-            <a:r>
-              <a:rPr/>
-              <a:t>Научная презентация — рабочий инструмент исследователя</a:t>
-            </a:r>
-          </a:p>
-          <a:p>
-            <a:pPr lvl="0"/>
-            <a:r>
-              <a:rPr/>
-              <a:t>Необходимо создавать презентацию быстро</a:t>
-            </a:r>
-          </a:p>
-          <a:p>
-            <a:pPr lvl="0"/>
-            <a:r>
-              <a:rPr/>
-              <a:t>Желательна минимизация усилий для создания презентации</a:t>
-            </a:r>
-          </a:p>
-        </p:txBody>
-      </p:sp>
-    </p:spTree>
-  </p:cSld>
-</p:sld>
-</file>
-
-<file path=ppt/slides/slide50.xml><?xml version="1.0" encoding="utf-8"?>
 <p:sld xmlns:a="http://schemas.openxmlformats.org/drawingml/2006/main" xmlns:r="http://schemas.openxmlformats.org/officeDocument/2006/relationships" xmlns:p="http://schemas.openxmlformats.org/presentationml/2006/main">
   <p:cSld>
     <p:spTree>
@@ -7990,6 +7692,343 @@
 </p:sld>
 </file>
 
+<file path=ppt/slides/slide47.xml><?xml version="1.0" encoding="utf-8"?>
+<p:sld xmlns:a="http://schemas.openxmlformats.org/drawingml/2006/main" xmlns:r="http://schemas.openxmlformats.org/officeDocument/2006/relationships" xmlns:p="http://schemas.openxmlformats.org/presentationml/2006/main">
+  <p:cSld>
+    <p:spTree>
+      <p:nvGrpSpPr>
+        <p:cNvPr id="1" name=""/>
+        <p:cNvGrpSpPr/>
+        <p:nvPr/>
+      </p:nvGrpSpPr>
+      <p:grpSpPr>
+        <a:xfrm>
+          <a:off x="0" y="0"/>
+          <a:ext cx="0" cy="0"/>
+          <a:chOff x="0" y="0"/>
+          <a:chExt cx="0" cy="0"/>
+        </a:xfrm>
+      </p:grpSpPr>
+    </p:spTree>
+  </p:cSld>
+</p:sld>
+</file>
+
+<file path=ppt/slides/slide48.xml><?xml version="1.0" encoding="utf-8"?>
+<p:sld xmlns:a="http://schemas.openxmlformats.org/drawingml/2006/main" xmlns:r="http://schemas.openxmlformats.org/officeDocument/2006/relationships" xmlns:p="http://schemas.openxmlformats.org/presentationml/2006/main">
+  <p:cSld>
+    <p:spTree>
+      <p:nvGrpSpPr>
+        <p:cNvPr id="1" name=""/>
+        <p:cNvGrpSpPr/>
+        <p:nvPr/>
+      </p:nvGrpSpPr>
+      <p:grpSpPr>
+        <a:xfrm>
+          <a:off x="0" y="0"/>
+          <a:ext cx="0" cy="0"/>
+          <a:chOff x="0" y="0"/>
+          <a:chExt cx="0" cy="0"/>
+        </a:xfrm>
+      </p:grpSpPr>
+      <p:sp>
+        <p:nvSpPr>
+          <p:cNvPr id="2" name="Title 1"/>
+          <p:cNvSpPr>
+            <a:spLocks noGrp="1"/>
+          </p:cNvSpPr>
+          <p:nvPr>
+            <p:ph type="title"/>
+          </p:nvPr>
+        </p:nvSpPr>
+        <p:spPr/>
+        <p:txBody>
+          <a:bodyPr/>
+          <a:lstStyle/>
+          <a:p>
+            <a:pPr lvl="0" indent="0" marL="0">
+              <a:buNone/>
+            </a:pPr>
+            <a:r>
+              <a:rPr/>
+              <a:t>3. Какая операция должна быть выполнена, чтобы содержимое некоторой файловой системы было доступно операционной системе?</a:t>
+            </a:r>
+          </a:p>
+        </p:txBody>
+      </p:sp>
+      <p:sp>
+        <p:nvSpPr>
+          <p:cNvPr id="3" name="Content Placeholder 2"/>
+          <p:cNvSpPr>
+            <a:spLocks noGrp="1"/>
+          </p:cNvSpPr>
+          <p:nvPr>
+            <p:ph idx="1"/>
+          </p:nvPr>
+        </p:nvSpPr>
+        <p:spPr/>
+        <p:txBody>
+          <a:bodyPr/>
+          <a:lstStyle/>
+          <a:p>
+            <a:pPr lvl="0" indent="0" marL="0">
+              <a:buNone/>
+            </a:pPr>
+            <a:r>
+              <a:rPr/>
+              <a:t>Необходимо выполнить </a:t>
+            </a:r>
+            <a:r>
+              <a:rPr b="1"/>
+              <a:t>монтирование (mount)</a:t>
+            </a:r>
+            <a:r>
+              <a:rPr/>
+              <a:t> файловой системы. Для этого используется команда </a:t>
+            </a:r>
+            <a:r>
+              <a:rPr>
+                <a:latin typeface="Courier"/>
+              </a:rPr>
+              <a:t>mount</a:t>
+            </a:r>
+            <a:r>
+              <a:rPr/>
+              <a:t>, которая связывает устройство (раздел диска) с точкой монтирования (каталогом). Пример: ```bash mount /dev/sdb1 /mnt/data</a:t>
+            </a:r>
+          </a:p>
+          <a:p>
+            <a:pPr lvl="0" indent="0" marL="0">
+              <a:buNone/>
+            </a:pPr>
+            <a:r>
+              <a:rPr/>
+              <a:t>После этого содержимое раздела /dev/sdb1 становится доступным в каталоге /mnt/data.</a:t>
+            </a:r>
+          </a:p>
+        </p:txBody>
+      </p:sp>
+    </p:spTree>
+  </p:cSld>
+</p:sld>
+</file>
+
+<file path=ppt/slides/slide49.xml><?xml version="1.0" encoding="utf-8"?>
+<p:sld xmlns:a="http://schemas.openxmlformats.org/drawingml/2006/main" xmlns:r="http://schemas.openxmlformats.org/officeDocument/2006/relationships" xmlns:p="http://schemas.openxmlformats.org/presentationml/2006/main">
+  <p:cSld>
+    <p:spTree>
+      <p:nvGrpSpPr>
+        <p:cNvPr id="1" name=""/>
+        <p:cNvGrpSpPr/>
+        <p:nvPr/>
+      </p:nvGrpSpPr>
+      <p:grpSpPr>
+        <a:xfrm>
+          <a:off x="0" y="0"/>
+          <a:ext cx="0" cy="0"/>
+          <a:chOff x="0" y="0"/>
+          <a:chExt cx="0" cy="0"/>
+        </a:xfrm>
+      </p:grpSpPr>
+      <p:sp>
+        <p:nvSpPr>
+          <p:cNvPr id="2" name="Title 1"/>
+          <p:cNvSpPr>
+            <a:spLocks noGrp="1"/>
+          </p:cNvSpPr>
+          <p:nvPr>
+            <p:ph type="title"/>
+          </p:nvPr>
+        </p:nvSpPr>
+        <p:spPr/>
+        <p:txBody>
+          <a:bodyPr/>
+          <a:lstStyle/>
+          <a:p>
+            <a:pPr lvl="0" indent="0" marL="0">
+              <a:buNone/>
+            </a:pPr>
+            <a:r>
+              <a:rPr/>
+              <a:t>4. Назовите основные причины нарушения целостности файловой системы. Как устранить повреждения файловой системы?</a:t>
+            </a:r>
+          </a:p>
+        </p:txBody>
+      </p:sp>
+      <p:sp>
+        <p:nvSpPr>
+          <p:cNvPr id="3" name="Content Placeholder 2"/>
+          <p:cNvSpPr>
+            <a:spLocks noGrp="1"/>
+          </p:cNvSpPr>
+          <p:nvPr>
+            <p:ph idx="1"/>
+          </p:nvPr>
+        </p:nvSpPr>
+        <p:spPr/>
+        <p:txBody>
+          <a:bodyPr/>
+          <a:lstStyle/>
+          <a:p>
+            <a:pPr lvl="0" indent="0" marL="0">
+              <a:buNone/>
+            </a:pPr>
+            <a:r>
+              <a:rPr/>
+              <a:t>Причины нарушения целостности:</a:t>
+            </a:r>
+          </a:p>
+          <a:p>
+            <a:pPr lvl="0" indent="0">
+              <a:buNone/>
+            </a:pPr>
+            <a:r>
+              <a:rPr>
+                <a:latin typeface="Courier"/>
+              </a:rPr>
+              <a:t>- внезапное отключение питания
+- аппаратные сбои (плохие сектора на диске)
+- ошибки в работе программ или драйверов
+- некорректное завершение работы системы</a:t>
+            </a:r>
+          </a:p>
+        </p:txBody>
+      </p:sp>
+    </p:spTree>
+  </p:cSld>
+</p:sld>
+</file>
+
+<file path=ppt/slides/slide5.xml><?xml version="1.0" encoding="utf-8"?>
+<p:sld xmlns:a="http://schemas.openxmlformats.org/drawingml/2006/main" xmlns:r="http://schemas.openxmlformats.org/officeDocument/2006/relationships" xmlns:p="http://schemas.openxmlformats.org/presentationml/2006/main">
+  <p:cSld>
+    <p:spTree>
+      <p:nvGrpSpPr>
+        <p:cNvPr id="1" name=""/>
+        <p:cNvGrpSpPr/>
+        <p:nvPr/>
+      </p:nvGrpSpPr>
+      <p:grpSpPr>
+        <a:xfrm>
+          <a:off x="0" y="0"/>
+          <a:ext cx="0" cy="0"/>
+          <a:chOff x="0" y="0"/>
+          <a:chExt cx="0" cy="0"/>
+        </a:xfrm>
+      </p:grpSpPr>
+      <p:sp>
+        <p:nvSpPr>
+          <p:cNvPr id="3" name="Content Placeholder 2"/>
+          <p:cNvSpPr>
+            <a:spLocks noGrp="1"/>
+          </p:cNvSpPr>
+          <p:nvPr>
+            <p:ph idx="1"/>
+          </p:nvPr>
+        </p:nvSpPr>
+        <p:spPr/>
+        <p:txBody>
+          <a:bodyPr/>
+          <a:lstStyle/>
+          <a:p>
+            <a:pPr lvl="0" indent="0" marL="0">
+              <a:buNone/>
+            </a:pPr>
+            <a:r>
+              <a:rPr/>
+              <a:t>Ознакомление с файловой системой Linux, её структурой, именами и содержанием каталогов. Приобретение практических навыков по применению команд для работы с файлами и каталогами, по управлению процессами (и работами), по проверке использования диска и обслуживанию файловой системы.</a:t>
+            </a:r>
+          </a:p>
+        </p:txBody>
+      </p:sp>
+    </p:spTree>
+  </p:cSld>
+</p:sld>
+</file>
+
+<file path=ppt/slides/slide50.xml><?xml version="1.0" encoding="utf-8"?>
+<p:sld xmlns:a="http://schemas.openxmlformats.org/drawingml/2006/main" xmlns:r="http://schemas.openxmlformats.org/officeDocument/2006/relationships" xmlns:p="http://schemas.openxmlformats.org/presentationml/2006/main">
+  <p:cSld>
+    <p:spTree>
+      <p:nvGrpSpPr>
+        <p:cNvPr id="1" name=""/>
+        <p:cNvGrpSpPr/>
+        <p:nvPr/>
+      </p:nvGrpSpPr>
+      <p:grpSpPr>
+        <a:xfrm>
+          <a:off x="0" y="0"/>
+          <a:ext cx="0" cy="0"/>
+          <a:chOff x="0" y="0"/>
+          <a:chExt cx="0" cy="0"/>
+        </a:xfrm>
+      </p:grpSpPr>
+      <p:sp>
+        <p:nvSpPr>
+          <p:cNvPr id="3" name="Content Placeholder 2"/>
+          <p:cNvSpPr>
+            <a:spLocks noGrp="1"/>
+          </p:cNvSpPr>
+          <p:nvPr>
+            <p:ph idx="1"/>
+          </p:nvPr>
+        </p:nvSpPr>
+        <p:spPr/>
+        <p:txBody>
+          <a:bodyPr/>
+          <a:lstStyle/>
+          <a:p>
+            <a:pPr lvl="0" indent="0" marL="0">
+              <a:buNone/>
+            </a:pPr>
+            <a:r>
+              <a:rPr/>
+              <a:t>Устранение повреждений:</a:t>
+            </a:r>
+          </a:p>
+          <a:p>
+            <a:pPr lvl="0" indent="0" marL="0">
+              <a:buNone/>
+            </a:pPr>
+            <a:r>
+              <a:rPr/>
+              <a:t>1.Использование команды fsck (file system check):</a:t>
+            </a:r>
+          </a:p>
+          <a:p>
+            <a:pPr lvl="0" indent="0" marL="0">
+              <a:buNone/>
+            </a:pPr>
+            <a:r>
+              <a:rPr/>
+              <a:t>```bash fsck /dev/sda1</a:t>
+            </a:r>
+          </a:p>
+          <a:p>
+            <a:pPr lvl="0" indent="0" marL="0">
+              <a:buNone/>
+            </a:pPr>
+            <a:r>
+              <a:rPr/>
+              <a:t>2.Для журналируемых файловых систем (ext4) восстановление происходит быстрее за счёт журнала.</a:t>
+            </a:r>
+          </a:p>
+          <a:p>
+            <a:pPr lvl="0" indent="0" marL="0">
+              <a:buNone/>
+            </a:pPr>
+            <a:r>
+              <a:rPr/>
+              <a:t>3.В некоторых случаях может потребоваться загрузка с Live-системы для проверки корневого раздела.</a:t>
+            </a:r>
+          </a:p>
+        </p:txBody>
+      </p:sp>
+    </p:spTree>
+  </p:cSld>
+</p:sld>
+</file>
+
 <file path=ppt/slides/slide51.xml><?xml version="1.0" encoding="utf-8"?>
 <p:sld xmlns:a="http://schemas.openxmlformats.org/drawingml/2006/main" xmlns:r="http://schemas.openxmlformats.org/officeDocument/2006/relationships" xmlns:p="http://schemas.openxmlformats.org/presentationml/2006/main">
   <p:cSld>
@@ -8049,7 +8088,7 @@
             </a:pPr>
             <a:r>
               <a:rPr/>
-              <a:t>3. Какая операция должна быть выполнена, чтобы содержимое некоторой файловой системы было доступно операционной системе?</a:t>
+              <a:t>5. Как создаётся файловая система?</a:t>
             </a:r>
           </a:p>
         </p:txBody>
@@ -8074,25 +8113,7 @@
             </a:pPr>
             <a:r>
               <a:rPr/>
-              <a:t>Необходимо выполнить </a:t>
-            </a:r>
-            <a:r>
-              <a:rPr b="1"/>
-              <a:t>монтирование (mount)</a:t>
-            </a:r>
-            <a:r>
-              <a:rPr/>
-              <a:t> файловой системы. Для этого используется команда </a:t>
-            </a:r>
-            <a:r>
-              <a:rPr>
-                <a:latin typeface="Courier"/>
-              </a:rPr>
-              <a:t>mount</a:t>
-            </a:r>
-            <a:r>
-              <a:rPr/>
-              <a:t>, которая связывает устройство (раздел диска) с точкой монтирования (каталогом). Пример: ```bash mount /dev/sdb1 /mnt/data</a:t>
+              <a:t>Файловая система создаётся с помощью команды mkfs (make file system) для выбранного раздела. Примеры:</a:t>
             </a:r>
           </a:p>
           <a:p>
@@ -8101,7 +8122,16 @@
             </a:pPr>
             <a:r>
               <a:rPr/>
-              <a:t>После этого содержимое раздела /dev/sdb1 становится доступным в каталоге /mnt/data.</a:t>
+              <a:t>```bash mkfs.ext4 /dev/sdb1 # создание ext4 mkfs.xfs /dev/sdb2 # создание XFS mkfs.vfat /dev/sdb3 # создание FAT32</a:t>
+            </a:r>
+          </a:p>
+          <a:p>
+            <a:pPr lvl="0" indent="0" marL="0">
+              <a:buNone/>
+            </a:pPr>
+            <a:r>
+              <a:rPr/>
+              <a:t>Перед созданием файловой системы раздел должен быть размечен (с помощью fdisk, gdisk, parted).</a:t>
             </a:r>
           </a:p>
         </p:txBody>
@@ -8128,293 +8158,12 @@
           <a:chExt cx="0" cy="0"/>
         </a:xfrm>
       </p:grpSpPr>
-      <p:sp>
-        <p:nvSpPr>
-          <p:cNvPr id="2" name="Title 1"/>
-          <p:cNvSpPr>
-            <a:spLocks noGrp="1"/>
-          </p:cNvSpPr>
-          <p:nvPr>
-            <p:ph type="title"/>
-          </p:nvPr>
-        </p:nvSpPr>
-        <p:spPr/>
-        <p:txBody>
-          <a:bodyPr/>
-          <a:lstStyle/>
-          <a:p>
-            <a:pPr lvl="0" indent="0" marL="0">
-              <a:buNone/>
-            </a:pPr>
-            <a:r>
-              <a:rPr/>
-              <a:t>4. Назовите основные причины нарушения целостности файловой системы. Как устранить повреждения файловой системы?</a:t>
-            </a:r>
-          </a:p>
-        </p:txBody>
-      </p:sp>
-      <p:sp>
-        <p:nvSpPr>
-          <p:cNvPr id="3" name="Content Placeholder 2"/>
-          <p:cNvSpPr>
-            <a:spLocks noGrp="1"/>
-          </p:cNvSpPr>
-          <p:nvPr>
-            <p:ph idx="1"/>
-          </p:nvPr>
-        </p:nvSpPr>
-        <p:spPr/>
-        <p:txBody>
-          <a:bodyPr/>
-          <a:lstStyle/>
-          <a:p>
-            <a:pPr lvl="0" indent="0" marL="0">
-              <a:buNone/>
-            </a:pPr>
-            <a:r>
-              <a:rPr/>
-              <a:t>Причины нарушения целостности:</a:t>
-            </a:r>
-          </a:p>
-          <a:p>
-            <a:pPr lvl="0" indent="0">
-              <a:buNone/>
-            </a:pPr>
-            <a:r>
-              <a:rPr>
-                <a:latin typeface="Courier"/>
-              </a:rPr>
-              <a:t>- внезапное отключение питания
-- аппаратные сбои (плохие сектора на диске)
-- ошибки в работе программ или драйверов
-- некорректное завершение работы системы</a:t>
-            </a:r>
-          </a:p>
-        </p:txBody>
-      </p:sp>
     </p:spTree>
   </p:cSld>
 </p:sld>
 </file>
 
 <file path=ppt/slides/slide54.xml><?xml version="1.0" encoding="utf-8"?>
-<p:sld xmlns:a="http://schemas.openxmlformats.org/drawingml/2006/main" xmlns:r="http://schemas.openxmlformats.org/officeDocument/2006/relationships" xmlns:p="http://schemas.openxmlformats.org/presentationml/2006/main">
-  <p:cSld>
-    <p:spTree>
-      <p:nvGrpSpPr>
-        <p:cNvPr id="1" name=""/>
-        <p:cNvGrpSpPr/>
-        <p:nvPr/>
-      </p:nvGrpSpPr>
-      <p:grpSpPr>
-        <a:xfrm>
-          <a:off x="0" y="0"/>
-          <a:ext cx="0" cy="0"/>
-          <a:chOff x="0" y="0"/>
-          <a:chExt cx="0" cy="0"/>
-        </a:xfrm>
-      </p:grpSpPr>
-      <p:sp>
-        <p:nvSpPr>
-          <p:cNvPr id="3" name="Content Placeholder 2"/>
-          <p:cNvSpPr>
-            <a:spLocks noGrp="1"/>
-          </p:cNvSpPr>
-          <p:nvPr>
-            <p:ph idx="1"/>
-          </p:nvPr>
-        </p:nvSpPr>
-        <p:spPr/>
-        <p:txBody>
-          <a:bodyPr/>
-          <a:lstStyle/>
-          <a:p>
-            <a:pPr lvl="0" indent="0" marL="0">
-              <a:buNone/>
-            </a:pPr>
-            <a:r>
-              <a:rPr/>
-              <a:t>Устранение повреждений:</a:t>
-            </a:r>
-          </a:p>
-          <a:p>
-            <a:pPr lvl="0" indent="0" marL="0">
-              <a:buNone/>
-            </a:pPr>
-            <a:r>
-              <a:rPr/>
-              <a:t>1.Использование команды fsck (file system check):</a:t>
-            </a:r>
-          </a:p>
-          <a:p>
-            <a:pPr lvl="0" indent="0" marL="0">
-              <a:buNone/>
-            </a:pPr>
-            <a:r>
-              <a:rPr/>
-              <a:t>```bash fsck /dev/sda1</a:t>
-            </a:r>
-          </a:p>
-          <a:p>
-            <a:pPr lvl="0" indent="0" marL="0">
-              <a:buNone/>
-            </a:pPr>
-            <a:r>
-              <a:rPr/>
-              <a:t>2.Для журналируемых файловых систем (ext4) восстановление происходит быстрее за счёт журнала.</a:t>
-            </a:r>
-          </a:p>
-          <a:p>
-            <a:pPr lvl="0" indent="0" marL="0">
-              <a:buNone/>
-            </a:pPr>
-            <a:r>
-              <a:rPr/>
-              <a:t>3.В некоторых случаях может потребоваться загрузка с Live-системы для проверки корневого раздела.</a:t>
-            </a:r>
-          </a:p>
-        </p:txBody>
-      </p:sp>
-    </p:spTree>
-  </p:cSld>
-</p:sld>
-</file>
-
-<file path=ppt/slides/slide55.xml><?xml version="1.0" encoding="utf-8"?>
-<p:sld xmlns:a="http://schemas.openxmlformats.org/drawingml/2006/main" xmlns:r="http://schemas.openxmlformats.org/officeDocument/2006/relationships" xmlns:p="http://schemas.openxmlformats.org/presentationml/2006/main">
-  <p:cSld>
-    <p:spTree>
-      <p:nvGrpSpPr>
-        <p:cNvPr id="1" name=""/>
-        <p:cNvGrpSpPr/>
-        <p:nvPr/>
-      </p:nvGrpSpPr>
-      <p:grpSpPr>
-        <a:xfrm>
-          <a:off x="0" y="0"/>
-          <a:ext cx="0" cy="0"/>
-          <a:chOff x="0" y="0"/>
-          <a:chExt cx="0" cy="0"/>
-        </a:xfrm>
-      </p:grpSpPr>
-    </p:spTree>
-  </p:cSld>
-</p:sld>
-</file>
-
-<file path=ppt/slides/slide56.xml><?xml version="1.0" encoding="utf-8"?>
-<p:sld xmlns:a="http://schemas.openxmlformats.org/drawingml/2006/main" xmlns:r="http://schemas.openxmlformats.org/officeDocument/2006/relationships" xmlns:p="http://schemas.openxmlformats.org/presentationml/2006/main">
-  <p:cSld>
-    <p:spTree>
-      <p:nvGrpSpPr>
-        <p:cNvPr id="1" name=""/>
-        <p:cNvGrpSpPr/>
-        <p:nvPr/>
-      </p:nvGrpSpPr>
-      <p:grpSpPr>
-        <a:xfrm>
-          <a:off x="0" y="0"/>
-          <a:ext cx="0" cy="0"/>
-          <a:chOff x="0" y="0"/>
-          <a:chExt cx="0" cy="0"/>
-        </a:xfrm>
-      </p:grpSpPr>
-      <p:sp>
-        <p:nvSpPr>
-          <p:cNvPr id="2" name="Title 1"/>
-          <p:cNvSpPr>
-            <a:spLocks noGrp="1"/>
-          </p:cNvSpPr>
-          <p:nvPr>
-            <p:ph type="title"/>
-          </p:nvPr>
-        </p:nvSpPr>
-        <p:spPr/>
-        <p:txBody>
-          <a:bodyPr/>
-          <a:lstStyle/>
-          <a:p>
-            <a:pPr lvl="0" indent="0" marL="0">
-              <a:buNone/>
-            </a:pPr>
-            <a:r>
-              <a:rPr/>
-              <a:t>5. Как создаётся файловая система?</a:t>
-            </a:r>
-          </a:p>
-        </p:txBody>
-      </p:sp>
-      <p:sp>
-        <p:nvSpPr>
-          <p:cNvPr id="3" name="Content Placeholder 2"/>
-          <p:cNvSpPr>
-            <a:spLocks noGrp="1"/>
-          </p:cNvSpPr>
-          <p:nvPr>
-            <p:ph idx="1"/>
-          </p:nvPr>
-        </p:nvSpPr>
-        <p:spPr/>
-        <p:txBody>
-          <a:bodyPr/>
-          <a:lstStyle/>
-          <a:p>
-            <a:pPr lvl="0" indent="0" marL="0">
-              <a:buNone/>
-            </a:pPr>
-            <a:r>
-              <a:rPr/>
-              <a:t>Файловая система создаётся с помощью команды mkfs (make file system) для выбранного раздела. Примеры:</a:t>
-            </a:r>
-          </a:p>
-          <a:p>
-            <a:pPr lvl="0" indent="0" marL="0">
-              <a:buNone/>
-            </a:pPr>
-            <a:r>
-              <a:rPr/>
-              <a:t>```bash mkfs.ext4 /dev/sdb1 # создание ext4 mkfs.xfs /dev/sdb2 # создание XFS mkfs.vfat /dev/sdb3 # создание FAT32</a:t>
-            </a:r>
-          </a:p>
-          <a:p>
-            <a:pPr lvl="0" indent="0" marL="0">
-              <a:buNone/>
-            </a:pPr>
-            <a:r>
-              <a:rPr/>
-              <a:t>Перед созданием файловой системы раздел должен быть размечен (с помощью fdisk, gdisk, parted).</a:t>
-            </a:r>
-          </a:p>
-        </p:txBody>
-      </p:sp>
-    </p:spTree>
-  </p:cSld>
-</p:sld>
-</file>
-
-<file path=ppt/slides/slide57.xml><?xml version="1.0" encoding="utf-8"?>
-<p:sld xmlns:a="http://schemas.openxmlformats.org/drawingml/2006/main" xmlns:r="http://schemas.openxmlformats.org/officeDocument/2006/relationships" xmlns:p="http://schemas.openxmlformats.org/presentationml/2006/main">
-  <p:cSld>
-    <p:spTree>
-      <p:nvGrpSpPr>
-        <p:cNvPr id="1" name=""/>
-        <p:cNvGrpSpPr/>
-        <p:nvPr/>
-      </p:nvGrpSpPr>
-      <p:grpSpPr>
-        <a:xfrm>
-          <a:off x="0" y="0"/>
-          <a:ext cx="0" cy="0"/>
-          <a:chOff x="0" y="0"/>
-          <a:chExt cx="0" cy="0"/>
-        </a:xfrm>
-      </p:grpSpPr>
-    </p:spTree>
-  </p:cSld>
-</p:sld>
-</file>
-
-<file path=ppt/slides/slide58.xml><?xml version="1.0" encoding="utf-8"?>
 <p:sld xmlns:a="http://schemas.openxmlformats.org/drawingml/2006/main" xmlns:r="http://schemas.openxmlformats.org/officeDocument/2006/relationships" xmlns:p="http://schemas.openxmlformats.org/presentationml/2006/main">
   <p:cSld>
     <p:spTree>
@@ -8834,7 +8583,7 @@
 </p:sld>
 </file>
 
-<file path=ppt/slides/slide59.xml><?xml version="1.0" encoding="utf-8"?>
+<file path=ppt/slides/slide55.xml><?xml version="1.0" encoding="utf-8"?>
 <p:sld xmlns:a="http://schemas.openxmlformats.org/drawingml/2006/main" xmlns:r="http://schemas.openxmlformats.org/officeDocument/2006/relationships" xmlns:p="http://schemas.openxmlformats.org/presentationml/2006/main">
   <p:cSld>
     <p:spTree>
@@ -8856,91 +8605,7 @@
 </p:sld>
 </file>
 
-<file path=ppt/slides/slide6.xml><?xml version="1.0" encoding="utf-8"?>
-<p:sld xmlns:a="http://schemas.openxmlformats.org/drawingml/2006/main" xmlns:r="http://schemas.openxmlformats.org/officeDocument/2006/relationships" xmlns:p="http://schemas.openxmlformats.org/presentationml/2006/main">
-  <p:cSld>
-    <p:spTree>
-      <p:nvGrpSpPr>
-        <p:cNvPr id="1" name=""/>
-        <p:cNvGrpSpPr/>
-        <p:nvPr/>
-      </p:nvGrpSpPr>
-      <p:grpSpPr>
-        <a:xfrm>
-          <a:off x="0" y="0"/>
-          <a:ext cx="0" cy="0"/>
-          <a:chOff x="0" y="0"/>
-          <a:chExt cx="0" cy="0"/>
-        </a:xfrm>
-      </p:grpSpPr>
-      <p:sp>
-        <p:nvSpPr>
-          <p:cNvPr id="2" name="Title 1"/>
-          <p:cNvSpPr>
-            <a:spLocks noGrp="1"/>
-          </p:cNvSpPr>
-          <p:nvPr>
-            <p:ph type="title"/>
-          </p:nvPr>
-        </p:nvSpPr>
-        <p:spPr/>
-        <p:txBody>
-          <a:bodyPr/>
-          <a:lstStyle/>
-          <a:p>
-            <a:pPr lvl="0" indent="0" marL="0">
-              <a:buNone/>
-            </a:pPr>
-            <a:r>
-              <a:rPr/>
-              <a:t>Объект и предмет исследования</a:t>
-            </a:r>
-          </a:p>
-        </p:txBody>
-      </p:sp>
-      <p:sp>
-        <p:nvSpPr>
-          <p:cNvPr id="3" name="Content Placeholder 2"/>
-          <p:cNvSpPr>
-            <a:spLocks noGrp="1"/>
-          </p:cNvSpPr>
-          <p:nvPr>
-            <p:ph idx="1"/>
-          </p:nvPr>
-        </p:nvSpPr>
-        <p:spPr/>
-        <p:txBody>
-          <a:bodyPr/>
-          <a:lstStyle/>
-          <a:p>
-            <a:pPr lvl="0"/>
-            <a:r>
-              <a:rPr/>
-              <a:t>Презентация как текст</a:t>
-            </a:r>
-          </a:p>
-          <a:p>
-            <a:pPr lvl="0"/>
-            <a:r>
-              <a:rPr/>
-              <a:t>Программное обеспечение для создания презентаций</a:t>
-            </a:r>
-          </a:p>
-          <a:p>
-            <a:pPr lvl="0"/>
-            <a:r>
-              <a:rPr/>
-              <a:t>Входные и выходные форматы презентаций</a:t>
-            </a:r>
-          </a:p>
-        </p:txBody>
-      </p:sp>
-    </p:spTree>
-  </p:cSld>
-</p:sld>
-</file>
-
-<file path=ppt/slides/slide60.xml><?xml version="1.0" encoding="utf-8"?>
+<file path=ppt/slides/slide56.xml><?xml version="1.0" encoding="utf-8"?>
 <p:sld xmlns:a="http://schemas.openxmlformats.org/drawingml/2006/main" xmlns:r="http://schemas.openxmlformats.org/officeDocument/2006/relationships" xmlns:p="http://schemas.openxmlformats.org/presentationml/2006/main">
   <p:cSld>
     <p:spTree>
@@ -9302,7 +8967,7 @@
 </p:sld>
 </file>
 
-<file path=ppt/slides/slide61.xml><?xml version="1.0" encoding="utf-8"?>
+<file path=ppt/slides/slide57.xml><?xml version="1.0" encoding="utf-8"?>
 <p:sld xmlns:a="http://schemas.openxmlformats.org/drawingml/2006/main" xmlns:r="http://schemas.openxmlformats.org/officeDocument/2006/relationships" xmlns:p="http://schemas.openxmlformats.org/presentationml/2006/main">
   <p:cSld>
     <p:spTree>
@@ -9367,7 +9032,7 @@
 </p:sld>
 </file>
 
-<file path=ppt/slides/slide62.xml><?xml version="1.0" encoding="utf-8"?>
+<file path=ppt/slides/slide58.xml><?xml version="1.0" encoding="utf-8"?>
 <p:sld xmlns:a="http://schemas.openxmlformats.org/drawingml/2006/main" xmlns:r="http://schemas.openxmlformats.org/officeDocument/2006/relationships" xmlns:p="http://schemas.openxmlformats.org/presentationml/2006/main">
   <p:cSld>
     <p:spTree>
@@ -9389,7 +9054,7 @@
 </p:sld>
 </file>
 
-<file path=ppt/slides/slide63.xml><?xml version="1.0" encoding="utf-8"?>
+<file path=ppt/slides/slide59.xml><?xml version="1.0" encoding="utf-8"?>
 <p:sld xmlns:a="http://schemas.openxmlformats.org/drawingml/2006/main" xmlns:r="http://schemas.openxmlformats.org/officeDocument/2006/relationships" xmlns:p="http://schemas.openxmlformats.org/presentationml/2006/main">
   <p:cSld>
     <p:spTree>
@@ -9664,6 +9329,292 @@
 </p:sld>
 </file>
 
+<file path=ppt/slides/slide6.xml><?xml version="1.0" encoding="utf-8"?>
+<p:sld xmlns:a="http://schemas.openxmlformats.org/drawingml/2006/main" xmlns:r="http://schemas.openxmlformats.org/officeDocument/2006/relationships" xmlns:p="http://schemas.openxmlformats.org/presentationml/2006/main">
+  <p:cSld>
+    <p:spTree>
+      <p:nvGrpSpPr>
+        <p:cNvPr id="1" name=""/>
+        <p:cNvGrpSpPr/>
+        <p:nvPr/>
+      </p:nvGrpSpPr>
+      <p:grpSpPr>
+        <a:xfrm>
+          <a:off x="0" y="0"/>
+          <a:ext cx="0" cy="0"/>
+          <a:chOff x="0" y="0"/>
+          <a:chExt cx="0" cy="0"/>
+        </a:xfrm>
+      </p:grpSpPr>
+    </p:spTree>
+  </p:cSld>
+</p:sld>
+</file>
+
+<file path=ppt/slides/slide60.xml><?xml version="1.0" encoding="utf-8"?>
+<p:sld xmlns:a="http://schemas.openxmlformats.org/drawingml/2006/main" xmlns:r="http://schemas.openxmlformats.org/officeDocument/2006/relationships" xmlns:p="http://schemas.openxmlformats.org/presentationml/2006/main">
+  <p:cSld>
+    <p:spTree>
+      <p:nvGrpSpPr>
+        <p:cNvPr id="1" name=""/>
+        <p:cNvGrpSpPr/>
+        <p:nvPr/>
+      </p:nvGrpSpPr>
+      <p:grpSpPr>
+        <a:xfrm>
+          <a:off x="0" y="0"/>
+          <a:ext cx="0" cy="0"/>
+          <a:chOff x="0" y="0"/>
+          <a:chExt cx="0" cy="0"/>
+        </a:xfrm>
+      </p:grpSpPr>
+      <p:sp>
+        <p:nvSpPr>
+          <p:cNvPr id="3" name="Content Placeholder 2"/>
+          <p:cNvSpPr>
+            <a:spLocks noGrp="1"/>
+          </p:cNvSpPr>
+          <p:nvPr>
+            <p:ph idx="1"/>
+          </p:nvPr>
+        </p:nvSpPr>
+        <p:spPr/>
+        <p:txBody>
+          <a:bodyPr/>
+          <a:lstStyle/>
+          <a:p>
+            <a:pPr lvl="0" indent="0" marL="0">
+              <a:buNone/>
+            </a:pPr>
+            <a:r>
+              <a:rPr/>
+              <a:t>```bash mv file1 file2 # переименование mv file1 dir/ # перемещение mv -i file1 file2 # запрос перед перезаписью</a:t>
+            </a:r>
+          </a:p>
+        </p:txBody>
+      </p:sp>
+    </p:spTree>
+  </p:cSld>
+</p:sld>
+</file>
+
+<file path=ppt/slides/slide61.xml><?xml version="1.0" encoding="utf-8"?>
+<p:sld xmlns:a="http://schemas.openxmlformats.org/drawingml/2006/main" xmlns:r="http://schemas.openxmlformats.org/officeDocument/2006/relationships" xmlns:p="http://schemas.openxmlformats.org/presentationml/2006/main">
+  <p:cSld>
+    <p:spTree>
+      <p:nvGrpSpPr>
+        <p:cNvPr id="1" name=""/>
+        <p:cNvGrpSpPr/>
+        <p:nvPr/>
+      </p:nvGrpSpPr>
+      <p:grpSpPr>
+        <a:xfrm>
+          <a:off x="0" y="0"/>
+          <a:ext cx="0" cy="0"/>
+          <a:chOff x="0" y="0"/>
+          <a:chExt cx="0" cy="0"/>
+        </a:xfrm>
+      </p:grpSpPr>
+    </p:spTree>
+  </p:cSld>
+</p:sld>
+</file>
+
+<file path=ppt/slides/slide62.xml><?xml version="1.0" encoding="utf-8"?>
+<p:sld xmlns:a="http://schemas.openxmlformats.org/drawingml/2006/main" xmlns:r="http://schemas.openxmlformats.org/officeDocument/2006/relationships" xmlns:p="http://schemas.openxmlformats.org/presentationml/2006/main">
+  <p:cSld>
+    <p:spTree>
+      <p:nvGrpSpPr>
+        <p:cNvPr id="1" name=""/>
+        <p:cNvGrpSpPr/>
+        <p:nvPr/>
+      </p:nvGrpSpPr>
+      <p:grpSpPr>
+        <a:xfrm>
+          <a:off x="0" y="0"/>
+          <a:ext cx="0" cy="0"/>
+          <a:chOff x="0" y="0"/>
+          <a:chExt cx="0" cy="0"/>
+        </a:xfrm>
+      </p:grpSpPr>
+      <p:sp>
+        <p:nvSpPr>
+          <p:cNvPr id="2" name="Title 1"/>
+          <p:cNvSpPr>
+            <a:spLocks noGrp="1"/>
+          </p:cNvSpPr>
+          <p:nvPr>
+            <p:ph type="title"/>
+          </p:nvPr>
+        </p:nvSpPr>
+        <p:spPr/>
+        <p:txBody>
+          <a:bodyPr/>
+          <a:lstStyle/>
+          <a:p>
+            <a:pPr lvl="0" indent="0" marL="0">
+              <a:buNone/>
+            </a:pPr>
+            <a:r>
+              <a:rPr/>
+              <a:t>9. Что такое права доступа? Как они могут быть изменены?</a:t>
+            </a:r>
+          </a:p>
+        </p:txBody>
+      </p:sp>
+      <p:sp>
+        <p:nvSpPr>
+          <p:cNvPr id="3" name="Content Placeholder 2"/>
+          <p:cNvSpPr>
+            <a:spLocks noGrp="1"/>
+          </p:cNvSpPr>
+          <p:nvPr>
+            <p:ph idx="1"/>
+          </p:nvPr>
+        </p:nvSpPr>
+        <p:spPr/>
+        <p:txBody>
+          <a:bodyPr/>
+          <a:lstStyle/>
+          <a:p>
+            <a:pPr lvl="0" indent="0" marL="0">
+              <a:buNone/>
+            </a:pPr>
+            <a:r>
+              <a:rPr/>
+              <a:t>Права доступа — это набор правил, определяющих, кто и какие действия может выполнять с файлом или каталогом. Права задаются для трёх категорий пользователей:</a:t>
+            </a:r>
+          </a:p>
+          <a:p>
+            <a:pPr lvl="0" indent="0">
+              <a:buNone/>
+            </a:pPr>
+            <a:r>
+              <a:rPr>
+                <a:latin typeface="Courier"/>
+              </a:rPr>
+              <a:t>u (user) — владелец
+g (group) — группа-владелец
+o (others) — все остальные</a:t>
+            </a:r>
+          </a:p>
+          <a:p>
+            <a:pPr lvl="0" indent="0" marL="0">
+              <a:buNone/>
+            </a:pPr>
+            <a:r>
+              <a:rPr/>
+              <a:t>Действия:</a:t>
+            </a:r>
+          </a:p>
+          <a:p>
+            <a:pPr lvl="0" indent="0">
+              <a:buNone/>
+            </a:pPr>
+            <a:r>
+              <a:rPr>
+                <a:latin typeface="Courier"/>
+              </a:rPr>
+              <a:t>r (read) — чтение
+w (write) — запись
+x (execute) — выполнение (для файлов) / доступ в каталог</a:t>
+            </a:r>
+          </a:p>
+        </p:txBody>
+      </p:sp>
+    </p:spTree>
+  </p:cSld>
+</p:sld>
+</file>
+
+<file path=ppt/slides/slide63.xml><?xml version="1.0" encoding="utf-8"?>
+<p:sld xmlns:a="http://schemas.openxmlformats.org/drawingml/2006/main" xmlns:r="http://schemas.openxmlformats.org/officeDocument/2006/relationships" xmlns:p="http://schemas.openxmlformats.org/presentationml/2006/main">
+  <p:cSld>
+    <p:spTree>
+      <p:nvGrpSpPr>
+        <p:cNvPr id="1" name=""/>
+        <p:cNvGrpSpPr/>
+        <p:nvPr/>
+      </p:nvGrpSpPr>
+      <p:grpSpPr>
+        <a:xfrm>
+          <a:off x="0" y="0"/>
+          <a:ext cx="0" cy="0"/>
+          <a:chOff x="0" y="0"/>
+          <a:chExt cx="0" cy="0"/>
+        </a:xfrm>
+      </p:grpSpPr>
+      <p:sp>
+        <p:nvSpPr>
+          <p:cNvPr id="3" name="Content Placeholder 2"/>
+          <p:cNvSpPr>
+            <a:spLocks noGrp="1"/>
+          </p:cNvSpPr>
+          <p:nvPr>
+            <p:ph idx="1"/>
+          </p:nvPr>
+        </p:nvSpPr>
+        <p:spPr/>
+        <p:txBody>
+          <a:bodyPr/>
+          <a:lstStyle/>
+          <a:p>
+            <a:pPr lvl="0" indent="0" marL="0">
+              <a:buNone/>
+            </a:pPr>
+            <a:r>
+              <a:rPr/>
+              <a:t>Изменение прав выполняется командой chmod (change mode) в двух форматах:</a:t>
+            </a:r>
+          </a:p>
+          <a:p>
+            <a:pPr lvl="0" indent="-342900" marL="342900">
+              <a:buAutoNum type="arabicPeriod"/>
+            </a:pPr>
+            <a:r>
+              <a:rPr/>
+              <a:t>Символьный формат:</a:t>
+            </a:r>
+          </a:p>
+          <a:p>
+            <a:pPr lvl="0" indent="0" marL="0">
+              <a:buNone/>
+            </a:pPr>
+            <a:r>
+              <a:rPr/>
+              <a:t>```bash</a:t>
+            </a:r>
+            <a:br/>
+            <a:r>
+              <a:rPr/>
+              <a:t>chmod u+x file # добавить выполнение для владельца chmod g-w file # убрать запись для группы chmod u=rwx,g=rx,o=r file # установить конкретные права</a:t>
+            </a:r>
+          </a:p>
+          <a:p>
+            <a:pPr lvl="0" indent="-342900" marL="342900">
+              <a:buAutoNum startAt="2" type="arabicPeriod"/>
+            </a:pPr>
+            <a:r>
+              <a:rPr/>
+              <a:t>Числовой (восьмеричный) формат:</a:t>
+            </a:r>
+          </a:p>
+          <a:p>
+            <a:pPr lvl="0" indent="0" marL="0">
+              <a:buNone/>
+            </a:pPr>
+            <a:r>
+              <a:rPr/>
+              <a:t>```bash chmod 755 file # rwxr-xr-x chmod 644 file # rw-r–r–</a:t>
+            </a:r>
+          </a:p>
+        </p:txBody>
+      </p:sp>
+    </p:spTree>
+  </p:cSld>
+</p:sld>
+</file>
+
 <file path=ppt/slides/slide64.xml><?xml version="1.0" encoding="utf-8"?>
 <p:sld xmlns:a="http://schemas.openxmlformats.org/drawingml/2006/main" xmlns:r="http://schemas.openxmlformats.org/officeDocument/2006/relationships" xmlns:p="http://schemas.openxmlformats.org/presentationml/2006/main">
   <p:cSld>
@@ -9681,31 +9632,6 @@
           <a:chExt cx="0" cy="0"/>
         </a:xfrm>
       </p:grpSpPr>
-      <p:sp>
-        <p:nvSpPr>
-          <p:cNvPr id="3" name="Content Placeholder 2"/>
-          <p:cNvSpPr>
-            <a:spLocks noGrp="1"/>
-          </p:cNvSpPr>
-          <p:nvPr>
-            <p:ph idx="1"/>
-          </p:nvPr>
-        </p:nvSpPr>
-        <p:spPr/>
-        <p:txBody>
-          <a:bodyPr/>
-          <a:lstStyle/>
-          <a:p>
-            <a:pPr lvl="0" indent="0" marL="0">
-              <a:buNone/>
-            </a:pPr>
-            <a:r>
-              <a:rPr/>
-              <a:t>```bash mv file1 file2 # переименование mv file1 dir/ # перемещение mv -i file1 file2 # запрос перед перезаписью</a:t>
-            </a:r>
-          </a:p>
-        </p:txBody>
-      </p:sp>
     </p:spTree>
   </p:cSld>
 </p:sld>
@@ -9728,6 +9654,36 @@
           <a:chExt cx="0" cy="0"/>
         </a:xfrm>
       </p:grpSpPr>
+      <p:sp>
+        <p:nvSpPr>
+          <p:cNvPr id="2" name="Title 1"/>
+          <p:cNvSpPr>
+            <a:spLocks noGrp="1"/>
+          </p:cNvSpPr>
+          <p:nvPr>
+            <p:ph type="title"/>
+          </p:nvPr>
+        </p:nvSpPr>
+        <p:spPr>
+          <a:xfrm>
+            <a:off x="722313" y="3305176"/>
+            <a:ext cx="7772400" cy="1021556"/>
+          </a:xfrm>
+        </p:spPr>
+        <p:txBody>
+          <a:bodyPr/>
+          <a:lstStyle/>
+          <a:p>
+            <a:pPr lvl="0" indent="0" marL="0">
+              <a:buNone/>
+            </a:pPr>
+            <a:r>
+              <a:rPr/>
+              <a:t>Вывод</a:t>
+            </a:r>
+          </a:p>
+        </p:txBody>
+      </p:sp>
     </p:spTree>
   </p:cSld>
 </p:sld>
@@ -9752,12 +9708,12 @@
       </p:grpSpPr>
       <p:sp>
         <p:nvSpPr>
-          <p:cNvPr id="2" name="Title 1"/>
-          <p:cNvSpPr>
-            <a:spLocks noGrp="1"/>
-          </p:cNvSpPr>
-          <p:nvPr>
-            <p:ph type="title"/>
+          <p:cNvPr id="3" name="Content Placeholder 2"/>
+          <p:cNvSpPr>
+            <a:spLocks noGrp="1"/>
+          </p:cNvSpPr>
+          <p:nvPr>
+            <p:ph idx="1"/>
           </p:nvPr>
         </p:nvSpPr>
         <p:spPr/>
@@ -9770,229 +9726,7 @@
             </a:pPr>
             <a:r>
               <a:rPr/>
-              <a:t>9. Что такое права доступа? Как они могут быть изменены?</a:t>
-            </a:r>
-          </a:p>
-        </p:txBody>
-      </p:sp>
-      <p:sp>
-        <p:nvSpPr>
-          <p:cNvPr id="3" name="Content Placeholder 2"/>
-          <p:cNvSpPr>
-            <a:spLocks noGrp="1"/>
-          </p:cNvSpPr>
-          <p:nvPr>
-            <p:ph idx="1"/>
-          </p:nvPr>
-        </p:nvSpPr>
-        <p:spPr/>
-        <p:txBody>
-          <a:bodyPr/>
-          <a:lstStyle/>
-          <a:p>
-            <a:pPr lvl="0" indent="0" marL="0">
-              <a:buNone/>
-            </a:pPr>
-            <a:r>
-              <a:rPr/>
-              <a:t>Права доступа — это набор правил, определяющих, кто и какие действия может выполнять с файлом или каталогом. Права задаются для трёх категорий пользователей:</a:t>
-            </a:r>
-          </a:p>
-          <a:p>
-            <a:pPr lvl="0" indent="0">
-              <a:buNone/>
-            </a:pPr>
-            <a:r>
-              <a:rPr>
-                <a:latin typeface="Courier"/>
-              </a:rPr>
-              <a:t>u (user) — владелец
-g (group) — группа-владелец
-o (others) — все остальные</a:t>
-            </a:r>
-          </a:p>
-          <a:p>
-            <a:pPr lvl="0" indent="0" marL="0">
-              <a:buNone/>
-            </a:pPr>
-            <a:r>
-              <a:rPr/>
-              <a:t>Действия:</a:t>
-            </a:r>
-          </a:p>
-          <a:p>
-            <a:pPr lvl="0" indent="0">
-              <a:buNone/>
-            </a:pPr>
-            <a:r>
-              <a:rPr>
-                <a:latin typeface="Courier"/>
-              </a:rPr>
-              <a:t>r (read) — чтение
-w (write) — запись
-x (execute) — выполнение (для файлов) / доступ в каталог</a:t>
-            </a:r>
-          </a:p>
-        </p:txBody>
-      </p:sp>
-    </p:spTree>
-  </p:cSld>
-</p:sld>
-</file>
-
-<file path=ppt/slides/slide67.xml><?xml version="1.0" encoding="utf-8"?>
-<p:sld xmlns:a="http://schemas.openxmlformats.org/drawingml/2006/main" xmlns:r="http://schemas.openxmlformats.org/officeDocument/2006/relationships" xmlns:p="http://schemas.openxmlformats.org/presentationml/2006/main">
-  <p:cSld>
-    <p:spTree>
-      <p:nvGrpSpPr>
-        <p:cNvPr id="1" name=""/>
-        <p:cNvGrpSpPr/>
-        <p:nvPr/>
-      </p:nvGrpSpPr>
-      <p:grpSpPr>
-        <a:xfrm>
-          <a:off x="0" y="0"/>
-          <a:ext cx="0" cy="0"/>
-          <a:chOff x="0" y="0"/>
-          <a:chExt cx="0" cy="0"/>
-        </a:xfrm>
-      </p:grpSpPr>
-      <p:sp>
-        <p:nvSpPr>
-          <p:cNvPr id="3" name="Content Placeholder 2"/>
-          <p:cNvSpPr>
-            <a:spLocks noGrp="1"/>
-          </p:cNvSpPr>
-          <p:nvPr>
-            <p:ph idx="1"/>
-          </p:nvPr>
-        </p:nvSpPr>
-        <p:spPr/>
-        <p:txBody>
-          <a:bodyPr/>
-          <a:lstStyle/>
-          <a:p>
-            <a:pPr lvl="0" indent="0" marL="0">
-              <a:buNone/>
-            </a:pPr>
-            <a:r>
-              <a:rPr/>
-              <a:t>Изменение прав выполняется командой chmod (change mode) в двух форматах:</a:t>
-            </a:r>
-          </a:p>
-          <a:p>
-            <a:pPr lvl="0" indent="-342900" marL="342900">
-              <a:buAutoNum type="arabicPeriod"/>
-            </a:pPr>
-            <a:r>
-              <a:rPr/>
-              <a:t>Символьный формат:</a:t>
-            </a:r>
-          </a:p>
-          <a:p>
-            <a:pPr lvl="0" indent="0" marL="0">
-              <a:buNone/>
-            </a:pPr>
-            <a:r>
-              <a:rPr/>
-              <a:t>```bash</a:t>
-            </a:r>
-            <a:br/>
-            <a:r>
-              <a:rPr/>
-              <a:t>chmod u+x file # добавить выполнение для владельца chmod g-w file # убрать запись для группы chmod u=rwx,g=rx,o=r file # установить конкретные права</a:t>
-            </a:r>
-          </a:p>
-          <a:p>
-            <a:pPr lvl="0" indent="-342900" marL="342900">
-              <a:buAutoNum startAt="2" type="arabicPeriod"/>
-            </a:pPr>
-            <a:r>
-              <a:rPr/>
-              <a:t>Числовой (восьмеричный) формат:</a:t>
-            </a:r>
-          </a:p>
-          <a:p>
-            <a:pPr lvl="0" indent="0" marL="0">
-              <a:buNone/>
-            </a:pPr>
-            <a:r>
-              <a:rPr/>
-              <a:t>```bash chmod 755 file # rwxr-xr-x chmod 644 file # rw-r–r–</a:t>
-            </a:r>
-          </a:p>
-        </p:txBody>
-      </p:sp>
-    </p:spTree>
-  </p:cSld>
-</p:sld>
-</file>
-
-<file path=ppt/slides/slide68.xml><?xml version="1.0" encoding="utf-8"?>
-<p:sld xmlns:a="http://schemas.openxmlformats.org/drawingml/2006/main" xmlns:r="http://schemas.openxmlformats.org/officeDocument/2006/relationships" xmlns:p="http://schemas.openxmlformats.org/presentationml/2006/main">
-  <p:cSld>
-    <p:spTree>
-      <p:nvGrpSpPr>
-        <p:cNvPr id="1" name=""/>
-        <p:cNvGrpSpPr/>
-        <p:nvPr/>
-      </p:nvGrpSpPr>
-      <p:grpSpPr>
-        <a:xfrm>
-          <a:off x="0" y="0"/>
-          <a:ext cx="0" cy="0"/>
-          <a:chOff x="0" y="0"/>
-          <a:chExt cx="0" cy="0"/>
-        </a:xfrm>
-      </p:grpSpPr>
-    </p:spTree>
-  </p:cSld>
-</p:sld>
-</file>
-
-<file path=ppt/slides/slide69.xml><?xml version="1.0" encoding="utf-8"?>
-<p:sld xmlns:a="http://schemas.openxmlformats.org/drawingml/2006/main" xmlns:r="http://schemas.openxmlformats.org/officeDocument/2006/relationships" xmlns:p="http://schemas.openxmlformats.org/presentationml/2006/main">
-  <p:cSld>
-    <p:spTree>
-      <p:nvGrpSpPr>
-        <p:cNvPr id="1" name=""/>
-        <p:cNvGrpSpPr/>
-        <p:nvPr/>
-      </p:nvGrpSpPr>
-      <p:grpSpPr>
-        <a:xfrm>
-          <a:off x="0" y="0"/>
-          <a:ext cx="0" cy="0"/>
-          <a:chOff x="0" y="0"/>
-          <a:chExt cx="0" cy="0"/>
-        </a:xfrm>
-      </p:grpSpPr>
-      <p:sp>
-        <p:nvSpPr>
-          <p:cNvPr id="2" name="Title 1"/>
-          <p:cNvSpPr>
-            <a:spLocks noGrp="1"/>
-          </p:cNvSpPr>
-          <p:nvPr>
-            <p:ph type="title"/>
-          </p:nvPr>
-        </p:nvSpPr>
-        <p:spPr>
-          <a:xfrm>
-            <a:off x="722313" y="3305176"/>
-            <a:ext cx="7772400" cy="1021556"/>
-          </a:xfrm>
-        </p:spPr>
-        <p:txBody>
-          <a:bodyPr/>
-          <a:lstStyle/>
-          <a:p>
-            <a:pPr lvl="0" indent="0" marL="0">
-              <a:buNone/>
-            </a:pPr>
-            <a:r>
-              <a:rPr/>
-              <a:t>Вывод</a:t>
+              <a:t>Мы ознакомились с файловой системой Linux, её структурой, именами и содержанием каталогов. Приобрели практические навыки по применению команд для работы с файлами и каталогами, по управлению процессами (и работами), по проверке использования диска и обслуживанию файловой системы.</a:t>
             </a:r>
           </a:p>
         </p:txBody>
@@ -10019,39 +9753,22 @@
           <a:chExt cx="0" cy="0"/>
         </a:xfrm>
       </p:grpSpPr>
-    </p:spTree>
-  </p:cSld>
-</p:sld>
-</file>
-
-<file path=ppt/slides/slide70.xml><?xml version="1.0" encoding="utf-8"?>
-<p:sld xmlns:a="http://schemas.openxmlformats.org/drawingml/2006/main" xmlns:r="http://schemas.openxmlformats.org/officeDocument/2006/relationships" xmlns:p="http://schemas.openxmlformats.org/presentationml/2006/main">
-  <p:cSld>
-    <p:spTree>
-      <p:nvGrpSpPr>
-        <p:cNvPr id="1" name=""/>
-        <p:cNvGrpSpPr/>
-        <p:nvPr/>
-      </p:nvGrpSpPr>
-      <p:grpSpPr>
-        <a:xfrm>
-          <a:off x="0" y="0"/>
-          <a:ext cx="0" cy="0"/>
-          <a:chOff x="0" y="0"/>
-          <a:chExt cx="0" cy="0"/>
-        </a:xfrm>
-      </p:grpSpPr>
-      <p:sp>
-        <p:nvSpPr>
-          <p:cNvPr id="3" name="Content Placeholder 2"/>
-          <p:cNvSpPr>
-            <a:spLocks noGrp="1"/>
-          </p:cNvSpPr>
-          <p:nvPr>
-            <p:ph idx="1"/>
-          </p:nvPr>
-        </p:nvSpPr>
-        <p:spPr/>
+      <p:sp>
+        <p:nvSpPr>
+          <p:cNvPr id="2" name="Title 1"/>
+          <p:cNvSpPr>
+            <a:spLocks noGrp="1"/>
+          </p:cNvSpPr>
+          <p:nvPr>
+            <p:ph type="title"/>
+          </p:nvPr>
+        </p:nvSpPr>
+        <p:spPr>
+          <a:xfrm>
+            <a:off x="722313" y="3305176"/>
+            <a:ext cx="7772400" cy="1021556"/>
+          </a:xfrm>
+        </p:spPr>
         <p:txBody>
           <a:bodyPr/>
           <a:lstStyle/>
@@ -10061,7 +9778,7 @@
             </a:pPr>
             <a:r>
               <a:rPr/>
-              <a:t>Мы ознакомились с файловой системой Linux, её структурой, именами и содержанием каталогов. Приобрели практические навыки по применению команд для работы с файлами и каталогами, по управлению процессами (и работами), по проверке использования диска и обслуживанию файловой системы.</a:t>
+              <a:t>Выполнение лабораторной работы</a:t>
             </a:r>
           </a:p>
         </p:txBody>
@@ -10098,22 +9815,77 @@
             <p:ph type="title"/>
           </p:nvPr>
         </p:nvSpPr>
+        <p:spPr/>
+        <p:txBody>
+          <a:bodyPr/>
+          <a:lstStyle/>
+          <a:p>
+            <a:pPr lvl="0" indent="0" marL="0">
+              <a:buNone/>
+            </a:pPr>
+            <a:r>
+              <a:rPr/>
+              <a:t>1. Выполним все примеры, приведённые в первой части описания лабораторной работы:</a:t>
+            </a:r>
+          </a:p>
+        </p:txBody>
+      </p:sp>
+      <p:pic>
+        <p:nvPicPr>
+          <p:cNvPr descr="image/1.png" id="0" name="Picture 1"/>
+          <p:cNvPicPr>
+            <a:picLocks noGrp="1" noChangeAspect="1"/>
+          </p:cNvPicPr>
+          <p:nvPr/>
+        </p:nvPicPr>
+        <p:blipFill>
+          <a:blip r:embed="rId2"/>
+          <a:stretch>
+            <a:fillRect/>
+          </a:stretch>
+        </p:blipFill>
+        <p:spPr bwMode="auto">
+          <a:xfrm>
+            <a:off x="1003300" y="1193800"/>
+            <a:ext cx="7124700" cy="2882900"/>
+          </a:xfrm>
+          <a:prstGeom prst="rect">
+            <a:avLst/>
+          </a:prstGeom>
+          <a:noFill/>
+          <a:ln w="9525">
+            <a:noFill/>
+            <a:headEnd/>
+            <a:tailEnd/>
+          </a:ln>
+        </p:spPr>
+      </p:pic>
+      <p:sp>
+        <p:nvSpPr>
+          <p:cNvPr id="1" name="TextBox 3"/>
+          <p:cNvSpPr txBox="1"/>
+          <p:nvPr/>
+        </p:nvSpPr>
         <p:spPr>
           <a:xfrm>
-            <a:off x="722313" y="3305176"/>
-            <a:ext cx="7772400" cy="1021556"/>
+            <a:off x="457200" y="4076700"/>
+            <a:ext cx="8229600" cy="508000"/>
           </a:xfrm>
+          <a:prstGeom prst="rect">
+            <a:avLst/>
+          </a:prstGeom>
+          <a:noFill/>
         </p:spPr>
         <p:txBody>
           <a:bodyPr/>
           <a:lstStyle/>
           <a:p>
-            <a:pPr lvl="0" indent="0" marL="0">
-              <a:buNone/>
-            </a:pPr>
-            <a:r>
-              <a:rPr/>
-              <a:t>Цель работы</a:t>
+            <a:pPr lvl="0" indent="0" marL="0" algn="ctr">
+              <a:buNone/>
+            </a:pPr>
+            <a:r>
+              <a:rPr/>
+              <a:t>Рисунок 1: Выполнение программ из примеров</a:t>
             </a:r>
           </a:p>
         </p:txBody>
@@ -10140,31 +9912,6 @@
           <a:chExt cx="0" cy="0"/>
         </a:xfrm>
       </p:grpSpPr>
-      <p:sp>
-        <p:nvSpPr>
-          <p:cNvPr id="3" name="Content Placeholder 2"/>
-          <p:cNvSpPr>
-            <a:spLocks noGrp="1"/>
-          </p:cNvSpPr>
-          <p:nvPr>
-            <p:ph idx="1"/>
-          </p:nvPr>
-        </p:nvSpPr>
-        <p:spPr/>
-        <p:txBody>
-          <a:bodyPr/>
-          <a:lstStyle/>
-          <a:p>
-            <a:pPr lvl="0" indent="0" marL="0">
-              <a:buNone/>
-            </a:pPr>
-            <a:r>
-              <a:rPr/>
-              <a:t>Ознакомление с файловой системой Linux, её структурой, именами и содержанием каталогов. Приобретение практических навыков по применению команд для работы с файлами и каталогами, по управлению процессами (и работами), по проверке использования диска и обслуживанию файловой системы.</a:t>
-            </a:r>
-          </a:p>
-        </p:txBody>
-      </p:sp>
     </p:spTree>
   </p:cSld>
 </p:sld>
